--- a/submission/ChangeLoop_SANKALP_2026.pptx
+++ b/submission/ChangeLoop_SANKALP_2026.pptx
@@ -19,9 +19,10 @@
     <p:sldId id="267" r:id="rId13"/>
     <p:sldId id="268" r:id="rId14"/>
     <p:sldId id="269" r:id="rId15"/>
+    <p:sldId id="270" r:id="rId16"/>
   </p:sldIdLst>
   <p:notesMasterIdLst>
-    <p:notesMasterId r:id="rId16"/>
+    <p:notesMasterId r:id="rId17"/>
   </p:notesMasterIdLst>
   <p:sldSz cx="12192000" cy="6858000"/>
   <p:notesSz cx="6858000" cy="12192000"/>
@@ -120,58 +121,59 @@
   <p:extLst>
     <p:ext uri="{521415D9-36F7-43E2-AB2F-B90AF26B5E84}">
       <p14:sectionLst xmlns:p14="http://schemas.microsoft.com/office/powerpoint/2010/main">
-        <p14:section name="Opening" id="{d631d922-0acf-4988-2d90-2ca8b5263e3f}">
+        <p14:section name="Opening" id="{b8e1a6ff-9810-f74d-8102-7848af884533}">
           <p14:sldIdLst>
             <p14:sldId id="256"/>
           </p14:sldIdLst>
         </p14:section>
-        <p14:section name="Summary" id="{e44b37a9-3fdd-46c2-8e71-8d7d98a310cb}">
+        <p14:section name="Summary" id="{f0dd3373-f5ea-6c31-566c-15769a9ae9e6}">
           <p14:sldIdLst>
             <p14:sldId id="257"/>
           </p14:sldIdLst>
         </p14:section>
-        <p14:section name="Problem" id="{98107327-412b-a859-073a-5098d0579b27}">
+        <p14:section name="Problem" id="{4951a4b1-4b11-d55a-99d1-a29ea8e0fbd2}">
           <p14:sldIdLst>
             <p14:sldId id="258"/>
             <p14:sldId id="259"/>
           </p14:sldIdLst>
         </p14:section>
-        <p14:section name="Insight" id="{781dbd75-aa1e-3de4-d8cb-20efa3c27387}">
+        <p14:section name="Insight" id="{6f82cd58-c86c-73ff-6e35-9a7a2c0d5e73}">
           <p14:sldIdLst>
             <p14:sldId id="260"/>
           </p14:sldIdLst>
         </p14:section>
-        <p14:section name="Solution" id="{f067ea75-1400-0644-f5a2-100188594e4a}">
+        <p14:section name="Solution" id="{06af25dc-e027-674e-7c1f-8a37ebdfe3f6}">
           <p14:sldIdLst>
             <p14:sldId id="261"/>
           </p14:sldIdLst>
         </p14:section>
-        <p14:section name="Innovation" id="{22627e25-a68e-fb41-7723-274f0acadecc}">
+        <p14:section name="Innovation" id="{fe1e12fd-4e1d-9a36-3e4c-370aac597b54}">
           <p14:sldIdLst>
             <p14:sldId id="262"/>
           </p14:sldIdLst>
         </p14:section>
-        <p14:section name="Product" id="{161a3286-7050-8963-f088-0ff88324695b}">
+        <p14:section name="Product" id="{0a23c684-17c9-210c-2d3f-b5c8f8f8ff8e}">
           <p14:sldIdLst>
             <p14:sldId id="263"/>
             <p14:sldId id="264"/>
           </p14:sldIdLst>
         </p14:section>
-        <p14:section name="Impact" id="{0b0800a6-f516-fc85-e746-17d242faddd3}">
+        <p14:section name="Impact" id="{b4b24d83-947f-c608-852f-dc0d624a31e1}">
           <p14:sldIdLst>
             <p14:sldId id="265"/>
             <p14:sldId id="266"/>
           </p14:sldIdLst>
         </p14:section>
-        <p14:section name="Path" id="{9fbaabb0-e1fd-c7df-1c11-f0a9f8722b90}">
+        <p14:section name="Path" id="{1ed9f264-077b-54e2-7d15-3e2473ccf947}">
           <p14:sldIdLst>
             <p14:sldId id="267"/>
             <p14:sldId id="268"/>
+            <p14:sldId id="269"/>
           </p14:sldIdLst>
         </p14:section>
-        <p14:section name="Team" id="{19df5b09-4a62-60d4-038a-d32aceb19270}">
+        <p14:section name="Team" id="{8c281f97-4ced-bb1c-e7e3-93bb3fa2e738}">
           <p14:sldIdLst>
-            <p14:sldId id="269"/>
+            <p14:sldId id="270"/>
           </p14:sldIdLst>
         </p14:section>
       </p14:sectionLst>
@@ -578,7 +580,7 @@
           <a:p>
             <a:r>
               <a:rPr lang="en-US" dirty="0"/>
-              <a:t>Open on the hook. Tirupur recycles 130 million litres a day under a court-mandated zero-discharge regime. It worked. It also raised costs 25 to 30 percent, and when units could not comply the courts closed them: about 11 billion rupees of exports and 100,000 jobs, by the industry association's own account. Nobody has costed the coal.</a:t>
+              <a:t>Say the title sentence out loud, then pause. Tirupur recycles 130 million litres a day under a court-mandated zero-discharge regime. It worked. It also raised costs 25 to 30 percent, and when units could not comply the courts closed them: about 11 billion rupees of exports and 100,000 jobs, by the industry association's own account. Nobody has costed the coal.</a:t>
             </a:r>
             <a:endParaRPr lang="en-US" dirty="0"/>
           </a:p>
@@ -1018,7 +1020,7 @@
           <a:p>
             <a:r>
               <a:rPr lang="en-US" dirty="0"/>
-              <a:t>Close on the team, then the weakness, then the hook. Naming the weakness before the jury does is the strongest thing we can do here: it tells them the rest of the numbers were assembled by people who look for their own errors. Then the memory line.</a:t>
+              <a:t>This is the slide that answers the hardest fair objection: you have no data. Correct. But watch what happens when we feed the model a number CPCB measured at a real unit and compare its output to what operators independently report. Twelve thousand gives exactly twenty percent, the floor of the band. Eighteen thousand three hundred and forty, CPCB's own measured inlet, gives thirty point six, the ceiling. The band is reproduced end to end and nothing was tuned to do it. Then be the first to say the limit out loud: this is validation, not measurement, and the ask on slide two is the two readings that would change that.</a:t>
             </a:r>
             <a:endParaRPr lang="en-US" dirty="0"/>
           </a:p>
@@ -1042,6 +1044,94 @@
             <a:fld id="{F7021451-1387-4CA6-816F-3879F97B5CBC}" type="slidenum">
               <a:rPr lang="en-US"/>
               <a:t>14</a:t>
+            </a:fld>
+            <a:endParaRPr lang="en-US"/>
+          </a:p>
+        </p:txBody>
+      </p:sp>
+    </p:spTree>
+    <p:extLst>
+      <p:ext uri="{BB962C8B-B14F-4D97-AF65-F5344CB8AC3E}">
+        <p14:creationId xmlns:p14="http://schemas.microsoft.com/office/powerpoint/2010/main" val="1024086991"/>
+      </p:ext>
+    </p:extLst>
+  </p:cSld>
+  <p:clrMapOvr>
+    <a:masterClrMapping/>
+  </p:clrMapOvr>
+</p:notes>
+</file>
+
+<file path=ppt/notesSlides/notesSlide15.xml><?xml version="1.0" encoding="utf-8"?>
+<p:notes xmlns:a="http://schemas.openxmlformats.org/drawingml/2006/main" xmlns:r="http://schemas.openxmlformats.org/officeDocument/2006/relationships" xmlns:p="http://schemas.openxmlformats.org/presentationml/2006/main">
+  <p:cSld>
+    <p:spTree>
+      <p:nvGrpSpPr>
+        <p:cNvPr id="1" name=""/>
+        <p:cNvGrpSpPr/>
+        <p:nvPr/>
+      </p:nvGrpSpPr>
+      <p:grpSpPr>
+        <a:xfrm>
+          <a:off x="0" y="0"/>
+          <a:ext cx="0" cy="0"/>
+          <a:chOff x="0" y="0"/>
+          <a:chExt cx="0" cy="0"/>
+        </a:xfrm>
+      </p:grpSpPr>
+      <p:sp>
+        <p:nvSpPr>
+          <p:cNvPr id="2" name="Slide Image Placeholder 1"/>
+          <p:cNvSpPr>
+            <a:spLocks noGrp="1" noRot="1" noChangeAspect="1"/>
+          </p:cNvSpPr>
+          <p:nvPr>
+            <p:ph type="sldImg"/>
+          </p:nvPr>
+        </p:nvSpPr>
+        <p:spPr/>
+      </p:sp>
+      <p:sp>
+        <p:nvSpPr>
+          <p:cNvPr id="3" name="Notes Placeholder 2"/>
+          <p:cNvSpPr>
+            <a:spLocks noGrp="1"/>
+          </p:cNvSpPr>
+          <p:nvPr>
+            <p:ph type="body" idx="1"/>
+          </p:nvPr>
+        </p:nvSpPr>
+        <p:spPr/>
+        <p:txBody>
+          <a:bodyPr/>
+          <a:lstStyle/>
+          <a:p>
+            <a:r>
+              <a:rPr lang="en-US" dirty="0"/>
+              <a:t>Close on the team, then the weakness, then the hook. Naming the weakness before the jury does is the strongest thing we can do here: it tells them the rest of the numbers were assembled by people who look for their own errors. Then the memory line.</a:t>
+            </a:r>
+            <a:endParaRPr lang="en-US" dirty="0"/>
+          </a:p>
+        </p:txBody>
+      </p:sp>
+      <p:sp>
+        <p:nvSpPr>
+          <p:cNvPr id="4" name="Slide Number Placeholder 3"/>
+          <p:cNvSpPr>
+            <a:spLocks noGrp="1"/>
+          </p:cNvSpPr>
+          <p:nvPr>
+            <p:ph type="sldNum" sz="quarter" idx="10"/>
+          </p:nvPr>
+        </p:nvSpPr>
+        <p:spPr/>
+        <p:txBody>
+          <a:bodyPr/>
+          <a:lstStyle/>
+          <a:p>
+            <a:fld id="{F7021451-1387-4CA6-816F-3879F97B5CBC}" type="slidenum">
+              <a:rPr lang="en-US"/>
+              <a:t>15</a:t>
             </a:fld>
             <a:endParaRPr lang="en-US"/>
           </a:p>
@@ -2863,39 +2953,43 @@
       </p:sp>
       <p:sp>
         <p:nvSpPr>
-          <p:cNvPr id="4" name="Text 0"/>
-          <p:cNvSpPr/>
-          <p:nvPr>
-            <p:ph idx="101" type="title" hasCustomPrompt="1"/>
-          </p:nvPr>
-        </p:nvSpPr>
-        <p:spPr>
-          <a:xfrm>
-            <a:off x="685800" y="1965960"/>
-            <a:ext cx="10789920" cy="1737360"/>
-          </a:xfrm>
-          <a:prstGeom prst="rect">
-            <a:avLst/>
-          </a:prstGeom>
-          <a:noFill/>
-          <a:ln/>
-        </p:spPr>
-        <p:txBody>
-          <a:bodyPr wrap="square" rtlCol="0" anchor="t"/>
+          <p:cNvPr id="4" name="title-hook"/>
+          <p:cNvSpPr txBox="1"/>
+          <p:nvPr/>
+        </p:nvSpPr>
+        <p:spPr>
+          <a:xfrm>
+            <a:off x="685800" y="1975104"/>
+            <a:ext cx="10789920" cy="2340864"/>
+          </a:xfrm>
+          <a:prstGeom prst="rect">
+            <a:avLst/>
+          </a:prstGeom>
+          <a:noFill/>
+          <a:ln/>
+        </p:spPr>
+        <p:txBody>
+          <a:bodyPr wrap="square" lIns="0" tIns="0" rIns="0" bIns="0" rtlCol="0" anchor="t"/>
           <a:lstStyle/>
           <a:p>
             <a:pPr algn="l" indent="0" marL="0">
-              <a:buNone/>
-            </a:pPr>
-            <a:r>
-              <a:rPr lang="en-US" sz="4200" b="1" dirty="0">
+              <a:lnSpc>
+                <a:spcPts val="4400"/>
+              </a:lnSpc>
+              <a:buNone/>
+            </a:pPr>
+            <a:r>
+              <a:rPr lang="en-US" sz="3600" b="1" dirty="0">
                 <a:solidFill>
                   <a:srgbClr val="FFFFFF"/>
                 </a:solidFill>
-              </a:rPr>
-              <a:t>A scheduling choice this morning sets how much coal the evaporator burns tonight</a:t>
-            </a:r>
-            <a:endParaRPr lang="en-US" sz="4200" dirty="0"/>
+                <a:latin typeface="Cambria" pitchFamily="34" charset="0"/>
+                <a:ea typeface="Cambria" pitchFamily="34" charset="-122"/>
+                <a:cs typeface="Cambria" pitchFamily="34" charset="-120"/>
+              </a:rPr>
+              <a:t>In a zero-discharge dyehouse, the coal bill is set by how much salt goes into the dye bath — not by how much water comes out.</a:t>
+            </a:r>
+            <a:endParaRPr lang="en-US" sz="3600" dirty="0"/>
           </a:p>
         </p:txBody>
       </p:sp>
@@ -2931,7 +3025,7 @@
                   <a:srgbClr val="FFFFFF"/>
                 </a:solidFill>
               </a:rPr>
-              <a:t>Resource decision intelligence for water-stressed industry. </a:t>
+              <a:t>A scheduling choice this morning sets how much coal the evaporator burns tonight. </a:t>
             </a:r>
             <a:pPr indent="0" marL="0">
               <a:buNone/>
@@ -3170,6 +3264,36 @@
               <a:t>LOST WHEN UNITS COULD NOT COMPLY</a:t>
             </a:r>
             <a:endParaRPr lang="en-US" sz="1000" dirty="0"/>
+          </a:p>
+        </p:txBody>
+      </p:sp>
+      <p:sp>
+        <p:nvSpPr>
+          <p:cNvPr id="13" name="Text 0"/>
+          <p:cNvSpPr/>
+          <p:nvPr>
+            <p:ph idx="101" type="title" hasCustomPrompt="1"/>
+          </p:nvPr>
+        </p:nvSpPr>
+        <p:spPr>
+          <a:xfrm>
+            <a:off x="685800" y="1965960"/>
+            <a:ext cx="10789920" cy="1737360"/>
+          </a:xfrm>
+          <a:prstGeom prst="rect">
+            <a:avLst/>
+          </a:prstGeom>
+          <a:noFill/>
+          <a:ln/>
+        </p:spPr>
+        <p:txBody>
+          <a:bodyPr wrap="square" rtlCol="0" anchor="t"/>
+          <a:lstStyle/>
+          <a:p>
+            <a:pPr algn="l" indent="0" marL="0">
+              <a:buNone/>
+            </a:pPr>
+            <a:endParaRPr lang="en-US" sz="4200" dirty="0"/>
           </a:p>
         </p:txBody>
       </p:sp>
@@ -3595,7 +3719,7 @@
                 <a:ea typeface="Cambria" pitchFamily="34" charset="-122"/>
                 <a:cs typeface="Cambria" pitchFamily="34" charset="-120"/>
               </a:rPr>
-              <a:t>187 kWh</a:t>
+              <a:t>196 kWh</a:t>
             </a:r>
             <a:endParaRPr lang="en-US" sz="3400" dirty="0"/>
           </a:p>
@@ -3720,7 +3844,7 @@
                 <a:ea typeface="Cambria" pitchFamily="34" charset="-122"/>
                 <a:cs typeface="Cambria" pitchFamily="34" charset="-120"/>
               </a:rPr>
-              <a:t>922 kg</a:t>
+              <a:t>926 kg</a:t>
             </a:r>
             <a:endParaRPr lang="en-US" sz="3400" dirty="0"/>
           </a:p>
@@ -3792,7 +3916,7 @@
                   <a:srgbClr val="55676C"/>
                 </a:solidFill>
               </a:rPr>
-              <a:t>₹9,514 saved per shift,</a:t>
+              <a:t>₹10,171 saved per shift,</a:t>
             </a:r>
             <a:endParaRPr lang="en-US" sz="1100" dirty="0"/>
           </a:p>
@@ -3948,7 +4072,7 @@
                   <a:srgbClr val="C2410C"/>
                 </a:solidFill>
               </a:rPr>
-              <a:t>13,435 MWh</a:t>
+              <a:t>14,106 MWh</a:t>
             </a:r>
             <a:pPr indent="0" marL="0">
               <a:buNone/>
@@ -3970,7 +4094,7 @@
                   <a:srgbClr val="5B5470"/>
                 </a:solidFill>
               </a:rPr>
-              <a:t>6,073 tonnes CO₂e</a:t>
+              <a:t>6,376 tonnes CO₂e</a:t>
             </a:r>
             <a:pPr indent="0" marL="0">
               <a:buNone/>
@@ -4760,7 +4884,7 @@
                           <a:ea typeface="Calibri" pitchFamily="34" charset="-122"/>
                           <a:cs typeface="Calibri" pitchFamily="34" charset="-120"/>
                         </a:rPr>
-                        <a:t>5,538 L</a:t>
+                        <a:t>720 L</a:t>
                       </a:r>
                       <a:endParaRPr lang="en-US" sz="1200" dirty="0">
                         <a:latin typeface="Calibri" charset="0"/>
@@ -4896,7 +5020,7 @@
                           <a:ea typeface="Calibri" pitchFamily="34" charset="-122"/>
                           <a:cs typeface="Calibri" pitchFamily="34" charset="-120"/>
                         </a:rPr>
-                        <a:t>0</a:t>
+                        <a:t>undefined</a:t>
                       </a:r>
                       <a:endParaRPr lang="en-US" sz="1200" dirty="0">
                         <a:latin typeface="Calibri" charset="0"/>
@@ -5170,7 +5294,7 @@
                           <a:ea typeface="Calibri" pitchFamily="34" charset="-122"/>
                           <a:cs typeface="Calibri" pitchFamily="34" charset="-120"/>
                         </a:rPr>
-                        <a:t>13.0%</a:t>
+                        <a:t>100.0%</a:t>
                       </a:r>
                       <a:endParaRPr lang="en-US" sz="1200" dirty="0">
                         <a:latin typeface="Calibri" charset="0"/>
@@ -5238,7 +5362,7 @@
                           <a:ea typeface="Calibri" pitchFamily="34" charset="-122"/>
                           <a:cs typeface="Calibri" pitchFamily="34" charset="-120"/>
                         </a:rPr>
-                        <a:t>0</a:t>
+                        <a:t>undefined</a:t>
                       </a:r>
                       <a:endParaRPr lang="en-US" sz="1200" dirty="0">
                         <a:latin typeface="Calibri" charset="0"/>
@@ -5306,7 +5430,7 @@
                           <a:ea typeface="Calibri" pitchFamily="34" charset="-122"/>
                           <a:cs typeface="Calibri" pitchFamily="34" charset="-120"/>
                         </a:rPr>
-                        <a:t>loses most of the benefit</a:t>
+                        <a:t>no effect at this site</a:t>
                       </a:r>
                       <a:endParaRPr lang="en-US" sz="1200" dirty="0">
                         <a:latin typeface="Calibri" charset="0"/>
@@ -5512,7 +5636,7 @@
                           <a:ea typeface="Calibri" pitchFamily="34" charset="-122"/>
                           <a:cs typeface="Calibri" pitchFamily="34" charset="-120"/>
                         </a:rPr>
-                        <a:t>42.3%</a:t>
+                        <a:t>325.4%</a:t>
                       </a:r>
                       <a:endParaRPr lang="en-US" sz="1200" dirty="0">
                         <a:latin typeface="Calibri" charset="0"/>
@@ -5580,7 +5704,7 @@
                           <a:ea typeface="Calibri" pitchFamily="34" charset="-122"/>
                           <a:cs typeface="Calibri" pitchFamily="34" charset="-120"/>
                         </a:rPr>
-                        <a:t>0</a:t>
+                        <a:t>undefined</a:t>
                       </a:r>
                       <a:endParaRPr lang="en-US" sz="1200" dirty="0">
                         <a:latin typeface="Calibri" charset="0"/>
@@ -5786,7 +5910,7 @@
                           <a:ea typeface="Calibri" pitchFamily="34" charset="-122"/>
                           <a:cs typeface="Calibri" pitchFamily="34" charset="-120"/>
                         </a:rPr>
-                        <a:t>5,538 L</a:t>
+                        <a:t>720 L</a:t>
                       </a:r>
                       <a:endParaRPr lang="en-US" sz="1200" dirty="0">
                         <a:latin typeface="Calibri" charset="0"/>
@@ -5922,7 +6046,7 @@
                           <a:ea typeface="Calibri" pitchFamily="34" charset="-122"/>
                           <a:cs typeface="Calibri" pitchFamily="34" charset="-120"/>
                         </a:rPr>
-                        <a:t>0</a:t>
+                        <a:t>undefined</a:t>
                       </a:r>
                       <a:endParaRPr lang="en-US" sz="1200" dirty="0">
                         <a:latin typeface="Calibri" charset="0"/>
@@ -6054,7 +6178,7 @@
                       <a:r>
                         <a:rPr lang="en-US" sz="1200" b="1" dirty="0">
                           <a:solidFill>
-                            <a:srgbClr val="B23A2B"/>
+                            <a:srgbClr val="0E2127"/>
                           </a:solidFill>
                           <a:latin typeface="Calibri" pitchFamily="34" charset="0"/>
                           <a:ea typeface="Calibri" pitchFamily="34" charset="-122"/>
@@ -6107,7 +6231,7 @@
                       <a:tailEnd type="none" w="med" len="med"/>
                     </a:lnB>
                     <a:solidFill>
-                      <a:srgbClr val="FBEDEA"/>
+                      <a:srgbClr val="FFFFFF"/>
                     </a:solidFill>
                   </a:tcPr>
                 </a:tc>
@@ -6122,13 +6246,13 @@
                       <a:r>
                         <a:rPr lang="en-US" sz="1200" dirty="0">
                           <a:solidFill>
-                            <a:srgbClr val="B23A2B"/>
+                            <a:srgbClr val="33474C"/>
                           </a:solidFill>
                           <a:latin typeface="Calibri" pitchFamily="34" charset="0"/>
                           <a:ea typeface="Calibri" pitchFamily="34" charset="-122"/>
                           <a:cs typeface="Calibri" pitchFamily="34" charset="-120"/>
                         </a:rPr>
-                        <a:t>6,018 L</a:t>
+                        <a:t>1,200 L</a:t>
                       </a:r>
                       <a:endParaRPr lang="en-US" sz="1200" dirty="0">
                         <a:latin typeface="Calibri" charset="0"/>
@@ -6175,7 +6299,7 @@
                       <a:tailEnd type="none" w="med" len="med"/>
                     </a:lnB>
                     <a:solidFill>
-                      <a:srgbClr val="FBEDEA"/>
+                      <a:srgbClr val="FFFFFF"/>
                     </a:solidFill>
                   </a:tcPr>
                 </a:tc>
@@ -6190,13 +6314,13 @@
                       <a:r>
                         <a:rPr lang="en-US" sz="1200" dirty="0">
                           <a:solidFill>
-                            <a:srgbClr val="B23A2B"/>
+                            <a:srgbClr val="33474C"/>
                           </a:solidFill>
                           <a:latin typeface="Calibri" pitchFamily="34" charset="0"/>
                           <a:ea typeface="Calibri" pitchFamily="34" charset="-122"/>
                           <a:cs typeface="Calibri" pitchFamily="34" charset="-120"/>
                         </a:rPr>
-                        <a:t>108.7%</a:t>
+                        <a:t>166.7%</a:t>
                       </a:r>
                       <a:endParaRPr lang="en-US" sz="1200" dirty="0">
                         <a:latin typeface="Calibri" charset="0"/>
@@ -6243,7 +6367,7 @@
                       <a:tailEnd type="none" w="med" len="med"/>
                     </a:lnB>
                     <a:solidFill>
-                      <a:srgbClr val="FBEDEA"/>
+                      <a:srgbClr val="FFFFFF"/>
                     </a:solidFill>
                   </a:tcPr>
                 </a:tc>
@@ -6258,13 +6382,13 @@
                       <a:r>
                         <a:rPr lang="en-US" sz="1200" dirty="0">
                           <a:solidFill>
-                            <a:srgbClr val="B23A2B"/>
+                            <a:srgbClr val="33474C"/>
                           </a:solidFill>
                           <a:latin typeface="Calibri" pitchFamily="34" charset="0"/>
                           <a:ea typeface="Calibri" pitchFamily="34" charset="-122"/>
                           <a:cs typeface="Calibri" pitchFamily="34" charset="-120"/>
                         </a:rPr>
-                        <a:t>1</a:t>
+                        <a:t>undefined</a:t>
                       </a:r>
                       <a:endParaRPr lang="en-US" sz="1200" dirty="0">
                         <a:latin typeface="Calibri" charset="0"/>
@@ -6311,7 +6435,7 @@
                       <a:tailEnd type="none" w="med" len="med"/>
                     </a:lnB>
                     <a:solidFill>
-                      <a:srgbClr val="FBEDEA"/>
+                      <a:srgbClr val="FFFFFF"/>
                     </a:solidFill>
                   </a:tcPr>
                 </a:tc>
@@ -6326,13 +6450,13 @@
                       <a:r>
                         <a:rPr lang="en-US" sz="1200" dirty="0">
                           <a:solidFill>
-                            <a:srgbClr val="B23A2B"/>
+                            <a:srgbClr val="33474C"/>
                           </a:solidFill>
                           <a:latin typeface="Calibri" pitchFamily="34" charset="0"/>
                           <a:ea typeface="Calibri" pitchFamily="34" charset="-122"/>
                           <a:cs typeface="Calibri" pitchFamily="34" charset="-120"/>
                         </a:rPr>
-                        <a:t>over-reports its saving</a:t>
+                        <a:t>loses most of the benefit</a:t>
                       </a:r>
                       <a:endParaRPr lang="en-US" sz="1200" dirty="0">
                         <a:latin typeface="Calibri" charset="0"/>
@@ -6379,7 +6503,7 @@
                       <a:tailEnd type="none" w="med" len="med"/>
                     </a:lnB>
                     <a:solidFill>
-                      <a:srgbClr val="FBEDEA"/>
+                      <a:srgbClr val="FFFFFF"/>
                     </a:solidFill>
                   </a:tcPr>
                 </a:tc>
@@ -10139,7 +10263,7 @@
                 <a:ea typeface="Cambria" pitchFamily="34" charset="-122"/>
                 <a:cs typeface="Cambria" pitchFamily="34" charset="-120"/>
               </a:rPr>
-              <a:t>95</a:t>
+              <a:t>140</a:t>
             </a:r>
             <a:endParaRPr lang="en-US" sz="3200" dirty="0"/>
           </a:p>
@@ -10175,7 +10299,7 @@
                   <a:srgbClr val="6B8086"/>
                 </a:solidFill>
               </a:rPr>
-              <a:t>ENGINE TESTS</a:t>
+              <a:t>AUTOMATED TESTS</a:t>
             </a:r>
             <a:endParaRPr lang="en-US" sz="1000" dirty="0"/>
           </a:p>
@@ -10211,7 +10335,7 @@
                   <a:srgbClr val="55676C"/>
                 </a:solidFill>
               </a:rPr>
-              <a:t>plus golden-path, safety,</a:t>
+              <a:t>engine, published-data validation,</a:t>
             </a:r>
             <a:endParaRPr lang="en-US" sz="1100" dirty="0"/>
           </a:p>
@@ -10225,7 +10349,7 @@
                   <a:srgbClr val="55676C"/>
                 </a:solidFill>
               </a:rPr>
-              <a:t>determinism and tamper suites</a:t>
+              <a:t>concurrency, safety and tamper</a:t>
             </a:r>
             <a:endParaRPr lang="en-US" sz="1100" dirty="0"/>
           </a:p>
@@ -10264,7 +10388,7 @@
                 <a:ea typeface="Cambria" pitchFamily="34" charset="-122"/>
                 <a:cs typeface="Cambria" pitchFamily="34" charset="-120"/>
               </a:rPr>
-              <a:t>25</a:t>
+              <a:t>32</a:t>
             </a:r>
             <a:endParaRPr lang="en-US" sz="3200" dirty="0"/>
           </a:p>
@@ -10896,10 +11020,10 @@
             <a:r>
               <a:rPr lang="en-US" sz="1100" b="1" spc="200" kern="0" dirty="0">
                 <a:solidFill>
-                  <a:srgbClr val="B98A2E"/>
-                </a:solidFill>
-              </a:rPr>
-              <a:t>THE TEAM</a:t>
+                  <a:srgbClr val="1A6B7C"/>
+                </a:solidFill>
+              </a:rPr>
+              <a:t>HOW WE CHECKED A MODEL WITH NO METERS</a:t>
             </a:r>
             <a:endParaRPr lang="en-US" sz="1100" dirty="0"/>
           </a:p>
@@ -10934,10 +11058,10 @@
             <a:r>
               <a:rPr lang="en-US" sz="3100" b="1" dirty="0">
                 <a:solidFill>
-                  <a:srgbClr val="FFFFFF"/>
-                </a:solidFill>
-              </a:rPr>
-              <a:t>Built, tested and adversarially reviewed</a:t>
+                  <a:srgbClr val="0E2127"/>
+                </a:solidFill>
+              </a:rPr>
+              <a:t>Fed real plant data, it predicts what real plants report</a:t>
             </a:r>
             <a:endParaRPr lang="en-US" sz="3100" dirty="0"/>
           </a:p>
@@ -10945,441 +11069,7 @@
       </p:sp>
       <p:sp>
         <p:nvSpPr>
-          <p:cNvPr id="4" name="tm-0"/>
-          <p:cNvSpPr txBox="1"/>
-          <p:nvPr/>
-        </p:nvSpPr>
-        <p:spPr>
-          <a:xfrm>
-            <a:off x="685800" y="1965960"/>
-            <a:ext cx="5120640" cy="384048"/>
-          </a:xfrm>
-          <a:prstGeom prst="rect">
-            <a:avLst/>
-          </a:prstGeom>
-          <a:noFill/>
-          <a:ln/>
-        </p:spPr>
-        <p:txBody>
-          <a:bodyPr wrap="square" lIns="0" tIns="0" rIns="0" bIns="0" rtlCol="0" anchor="ctr"/>
-          <a:lstStyle/>
-          <a:p>
-            <a:pPr indent="0" marL="0">
-              <a:buNone/>
-            </a:pPr>
-            <a:r>
-              <a:rPr lang="en-US" sz="1900" b="1" dirty="0">
-                <a:solidFill>
-                  <a:srgbClr val="FFFFFF"/>
-                </a:solidFill>
-                <a:latin typeface="Cambria" pitchFamily="34" charset="0"/>
-                <a:ea typeface="Cambria" pitchFamily="34" charset="-122"/>
-                <a:cs typeface="Cambria" pitchFamily="34" charset="-120"/>
-              </a:rPr>
-              <a:t>Shorya Mittal</a:t>
-            </a:r>
-            <a:endParaRPr lang="en-US" sz="1900" dirty="0"/>
-          </a:p>
-        </p:txBody>
-      </p:sp>
-      <p:sp>
-        <p:nvSpPr>
-          <p:cNvPr id="5" name="tr-0"/>
-          <p:cNvSpPr txBox="1"/>
-          <p:nvPr/>
-        </p:nvSpPr>
-        <p:spPr>
-          <a:xfrm>
-            <a:off x="685800" y="2377440"/>
-            <a:ext cx="5120640" cy="274320"/>
-          </a:xfrm>
-          <a:prstGeom prst="rect">
-            <a:avLst/>
-          </a:prstGeom>
-          <a:noFill/>
-          <a:ln/>
-        </p:spPr>
-        <p:txBody>
-          <a:bodyPr wrap="square" lIns="0" tIns="0" rIns="0" bIns="0" rtlCol="0" anchor="ctr"/>
-          <a:lstStyle/>
-          <a:p>
-            <a:pPr indent="0" marL="0">
-              <a:buNone/>
-            </a:pPr>
-            <a:r>
-              <a:rPr lang="en-US" sz="1000" b="1" spc="140" kern="0" dirty="0">
-                <a:solidFill>
-                  <a:srgbClr val="B98A2E"/>
-                </a:solidFill>
-              </a:rPr>
-              <a:t>TEAM LEADER</a:t>
-            </a:r>
-            <a:endParaRPr lang="en-US" sz="1000" dirty="0"/>
-          </a:p>
-        </p:txBody>
-      </p:sp>
-      <p:sp>
-        <p:nvSpPr>
-          <p:cNvPr id="6" name="td-0"/>
-          <p:cNvSpPr txBox="1"/>
-          <p:nvPr/>
-        </p:nvSpPr>
-        <p:spPr>
-          <a:xfrm>
-            <a:off x="685800" y="2688336"/>
-            <a:ext cx="5120640" cy="640080"/>
-          </a:xfrm>
-          <a:prstGeom prst="rect">
-            <a:avLst/>
-          </a:prstGeom>
-          <a:noFill/>
-          <a:ln/>
-        </p:spPr>
-        <p:txBody>
-          <a:bodyPr wrap="square" lIns="0" tIns="0" rIns="0" bIns="0" rtlCol="0" anchor="t"/>
-          <a:lstStyle/>
-          <a:p>
-            <a:pPr indent="0" marL="0">
-              <a:buNone/>
-            </a:pPr>
-            <a:r>
-              <a:rPr lang="en-US" sz="1200" dirty="0">
-                <a:solidFill>
-                  <a:srgbClr val="B7CBD0"/>
-                </a:solidFill>
-              </a:rPr>
-              <a:t>Engine, water accounting and interface</a:t>
-            </a:r>
-            <a:endParaRPr lang="en-US" sz="1200" dirty="0"/>
-          </a:p>
-        </p:txBody>
-      </p:sp>
-      <p:sp>
-        <p:nvSpPr>
-          <p:cNvPr id="7" name="rule12"/>
-          <p:cNvSpPr/>
-          <p:nvPr/>
-        </p:nvSpPr>
-        <p:spPr>
-          <a:xfrm>
-            <a:off x="685800" y="3438144"/>
-            <a:ext cx="10789920" cy="0"/>
-          </a:xfrm>
-          <a:prstGeom prst="line">
-            <a:avLst/>
-          </a:prstGeom>
-          <a:noFill/>
-          <a:ln w="12700">
-            <a:solidFill>
-              <a:srgbClr val="2A5460"/>
-            </a:solidFill>
-            <a:prstDash val="solid"/>
-          </a:ln>
-        </p:spPr>
-      </p:sp>
-      <p:sp>
-        <p:nvSpPr>
-          <p:cNvPr id="8" name="built-h"/>
-          <p:cNvSpPr txBox="1"/>
-          <p:nvPr/>
-        </p:nvSpPr>
-        <p:spPr>
-          <a:xfrm>
-            <a:off x="685800" y="3621024"/>
-            <a:ext cx="5120640" cy="310896"/>
-          </a:xfrm>
-          <a:prstGeom prst="rect">
-            <a:avLst/>
-          </a:prstGeom>
-          <a:noFill/>
-          <a:ln/>
-        </p:spPr>
-        <p:txBody>
-          <a:bodyPr wrap="square" lIns="0" tIns="0" rIns="0" bIns="0" rtlCol="0" anchor="ctr"/>
-          <a:lstStyle/>
-          <a:p>
-            <a:pPr indent="0" marL="0">
-              <a:buNone/>
-            </a:pPr>
-            <a:r>
-              <a:rPr lang="en-US" sz="1400" b="1" dirty="0">
-                <a:solidFill>
-                  <a:srgbClr val="FFFFFF"/>
-                </a:solidFill>
-                <a:latin typeface="Cambria" pitchFamily="34" charset="0"/>
-                <a:ea typeface="Cambria" pitchFamily="34" charset="-122"/>
-                <a:cs typeface="Cambria" pitchFamily="34" charset="-120"/>
-              </a:rPr>
-              <a:t>What exists today</a:t>
-            </a:r>
-            <a:endParaRPr lang="en-US" sz="1400" dirty="0"/>
-          </a:p>
-        </p:txBody>
-      </p:sp>
-      <p:sp>
-        <p:nvSpPr>
-          <p:cNvPr id="9" name="built-b"/>
-          <p:cNvSpPr txBox="1"/>
-          <p:nvPr/>
-        </p:nvSpPr>
-        <p:spPr>
-          <a:xfrm>
-            <a:off x="685800" y="3968496"/>
-            <a:ext cx="5120640" cy="1600200"/>
-          </a:xfrm>
-          <a:prstGeom prst="rect">
-            <a:avLst/>
-          </a:prstGeom>
-          <a:noFill/>
-          <a:ln/>
-        </p:spPr>
-        <p:txBody>
-          <a:bodyPr wrap="square" lIns="0" tIns="0" rIns="0" bIns="0" rtlCol="0" anchor="t"/>
-          <a:lstStyle/>
-          <a:p>
-            <a:pPr indent="0" marL="0">
-              <a:buNone/>
-            </a:pPr>
-            <a:r>
-              <a:rPr lang="en-US" sz="1250" dirty="0">
-                <a:solidFill>
-                  <a:srgbClr val="B7CBD0"/>
-                </a:solidFill>
-              </a:rPr>
-              <a:t>A working engine and interface, dependency-free. </a:t>
-            </a:r>
-            <a:pPr indent="0" marL="0">
-              <a:buNone/>
-            </a:pPr>
-            <a:r>
-              <a:rPr lang="en-US" sz="1250" b="1" dirty="0">
-                <a:solidFill>
-                  <a:srgbClr val="4ECF9E"/>
-                </a:solidFill>
-              </a:rPr>
-              <a:t>95 engine tests</a:t>
-            </a:r>
-            <a:pPr indent="0" marL="0">
-              <a:buNone/>
-            </a:pPr>
-            <a:r>
-              <a:rPr lang="en-US" sz="1250" dirty="0">
-                <a:solidFill>
-                  <a:srgbClr val="B7CBD0"/>
-                </a:solidFill>
-              </a:rPr>
-              <a:t>, a golden-path suite, safety-interlock tests across five fault modes, a ten-run determinism check, and a tamper test that breaks the ledger chain on purpose to prove it detects it.
-</a:t>
-            </a:r>
-            <a:pPr indent="0" marL="0">
-              <a:buNone/>
-            </a:pPr>
-            <a:r>
-              <a:rPr lang="en-US" sz="1250" b="1" dirty="0">
-                <a:solidFill>
-                  <a:srgbClr val="B7CBD0"/>
-                </a:solidFill>
-              </a:rPr>
-              <a:t>Evidence discipline: </a:t>
-            </a:r>
-            <a:pPr indent="0" marL="0">
-              <a:buNone/>
-            </a:pPr>
-            <a:r>
-              <a:rPr lang="en-US" sz="1250" dirty="0">
-                <a:solidFill>
-                  <a:srgbClr val="B7CBD0"/>
-                </a:solidFill>
-              </a:rPr>
-              <a:t>5 published, 2 derived, 13 assumed and </a:t>
-            </a:r>
-            <a:pPr indent="0" marL="0">
-              <a:buNone/>
-            </a:pPr>
-            <a:r>
-              <a:rPr lang="en-US" sz="1250" b="1" dirty="0">
-                <a:solidFill>
-                  <a:srgbClr val="E0B45A"/>
-                </a:solidFill>
-              </a:rPr>
-              <a:t>zero measured</a:t>
-            </a:r>
-            <a:pPr indent="0" marL="0">
-              <a:buNone/>
-            </a:pPr>
-            <a:r>
-              <a:rPr lang="en-US" sz="1250" dirty="0">
-                <a:solidFill>
-                  <a:srgbClr val="B7CBD0"/>
-                </a:solidFill>
-              </a:rPr>
-              <a:t> coefficients — enforced by a test.</a:t>
-            </a:r>
-            <a:endParaRPr lang="en-US" sz="1250" dirty="0"/>
-          </a:p>
-        </p:txBody>
-      </p:sp>
-      <p:sp>
-        <p:nvSpPr>
-          <p:cNvPr id="10" name="weak-h"/>
-          <p:cNvSpPr txBox="1"/>
-          <p:nvPr/>
-        </p:nvSpPr>
-        <p:spPr>
-          <a:xfrm>
-            <a:off x="6355080" y="3621024"/>
-            <a:ext cx="5120640" cy="310896"/>
-          </a:xfrm>
-          <a:prstGeom prst="rect">
-            <a:avLst/>
-          </a:prstGeom>
-          <a:noFill/>
-          <a:ln/>
-        </p:spPr>
-        <p:txBody>
-          <a:bodyPr wrap="square" lIns="0" tIns="0" rIns="0" bIns="0" rtlCol="0" anchor="ctr"/>
-          <a:lstStyle/>
-          <a:p>
-            <a:pPr indent="0" marL="0">
-              <a:buNone/>
-            </a:pPr>
-            <a:r>
-              <a:rPr lang="en-US" sz="1400" b="1" dirty="0">
-                <a:solidFill>
-                  <a:srgbClr val="E0B45A"/>
-                </a:solidFill>
-                <a:latin typeface="Cambria" pitchFamily="34" charset="0"/>
-                <a:ea typeface="Cambria" pitchFamily="34" charset="-122"/>
-                <a:cs typeface="Cambria" pitchFamily="34" charset="-120"/>
-              </a:rPr>
-              <a:t>Our biggest weakness, stated first</a:t>
-            </a:r>
-            <a:endParaRPr lang="en-US" sz="1400" dirty="0"/>
-          </a:p>
-        </p:txBody>
-      </p:sp>
-      <p:sp>
-        <p:nvSpPr>
-          <p:cNvPr id="11" name="weak-b"/>
-          <p:cNvSpPr txBox="1"/>
-          <p:nvPr/>
-        </p:nvSpPr>
-        <p:spPr>
-          <a:xfrm>
-            <a:off x="6355080" y="3968496"/>
-            <a:ext cx="5120640" cy="1463040"/>
-          </a:xfrm>
-          <a:prstGeom prst="rect">
-            <a:avLst/>
-          </a:prstGeom>
-          <a:noFill/>
-          <a:ln/>
-        </p:spPr>
-        <p:txBody>
-          <a:bodyPr wrap="square" lIns="0" tIns="0" rIns="0" bIns="0" rtlCol="0" anchor="t"/>
-          <a:lstStyle/>
-          <a:p>
-            <a:pPr indent="0" marL="0">
-              <a:buNone/>
-            </a:pPr>
-            <a:r>
-              <a:rPr lang="en-US" sz="1250" dirty="0">
-                <a:solidFill>
-                  <a:srgbClr val="B7CBD0"/>
-                </a:solidFill>
-              </a:rPr>
-              <a:t>We have not yet spoken to a dyehouse. Everything is modelled from public information, the basin weighting is a disclosed placeholder, and the optimiser handles one machine rather than a mill. Phase 1 of the pilot exists to replace our assumptions with their measurements — and some of our conclusions will change when it does.</a:t>
-            </a:r>
-            <a:endParaRPr lang="en-US" sz="1250" dirty="0"/>
-          </a:p>
-        </p:txBody>
-      </p:sp>
-      <p:sp>
-        <p:nvSpPr>
-          <p:cNvPr id="12" name="ask"/>
-          <p:cNvSpPr txBox="1"/>
-          <p:nvPr/>
-        </p:nvSpPr>
-        <p:spPr>
-          <a:xfrm>
-            <a:off x="685800" y="5559552"/>
-            <a:ext cx="10789920" cy="457200"/>
-          </a:xfrm>
-          <a:prstGeom prst="rect">
-            <a:avLst/>
-          </a:prstGeom>
-          <a:noFill/>
-          <a:ln/>
-        </p:spPr>
-        <p:txBody>
-          <a:bodyPr wrap="square" lIns="0" tIns="0" rIns="0" bIns="0" rtlCol="0" anchor="t"/>
-          <a:lstStyle/>
-          <a:p>
-            <a:pPr indent="0" marL="0">
-              <a:buNone/>
-            </a:pPr>
-            <a:r>
-              <a:rPr lang="en-US" sz="1200" b="1" dirty="0">
-                <a:solidFill>
-                  <a:srgbClr val="E0B45A"/>
-                </a:solidFill>
-              </a:rPr>
-              <a:t>What we are asking for:  </a:t>
-            </a:r>
-            <a:pPr indent="0" marL="0">
-              <a:buNone/>
-            </a:pPr>
-            <a:r>
-              <a:rPr lang="en-US" sz="1200" dirty="0">
-                <a:solidFill>
-                  <a:srgbClr val="B7CBD0"/>
-                </a:solidFill>
-              </a:rPr>
-              <a:t>one Tirupur dyeing unit or CETP willing to share two measured numbers: steam cost per cubic metre of reject, and the reject TDS ceiling. Our own sensitivity sweep says those two decide the answer, and they are the first thing Phase 1 measures.</a:t>
-            </a:r>
-            <a:endParaRPr lang="en-US" sz="1200" dirty="0"/>
-          </a:p>
-        </p:txBody>
-      </p:sp>
-      <p:sp>
-        <p:nvSpPr>
-          <p:cNvPr id="13" name="hook"/>
-          <p:cNvSpPr txBox="1"/>
-          <p:nvPr/>
-        </p:nvSpPr>
-        <p:spPr>
-          <a:xfrm>
-            <a:off x="685800" y="6053328"/>
-            <a:ext cx="10789920" cy="475488"/>
-          </a:xfrm>
-          <a:prstGeom prst="rect">
-            <a:avLst/>
-          </a:prstGeom>
-          <a:noFill/>
-          <a:ln/>
-        </p:spPr>
-        <p:txBody>
-          <a:bodyPr wrap="square" lIns="0" tIns="0" rIns="0" bIns="0" rtlCol="0" anchor="t"/>
-          <a:lstStyle/>
-          <a:p>
-            <a:pPr indent="0" marL="0">
-              <a:buNone/>
-            </a:pPr>
-            <a:r>
-              <a:rPr lang="en-US" sz="1500" b="1" i="1" dirty="0">
-                <a:solidFill>
-                  <a:srgbClr val="FFFFFF"/>
-                </a:solidFill>
-              </a:rPr>
-              <a:t>Zero Liquid Discharge gave India back its water. Nobody costed the coal it takes to keep it — and that cost is decided by a scheduling choice nobody connects to it.</a:t>
-            </a:r>
-            <a:endParaRPr lang="en-US" sz="1500" dirty="0"/>
-          </a:p>
-        </p:txBody>
-      </p:sp>
-      <p:sp>
-        <p:nvSpPr>
-          <p:cNvPr id="15" name="Text 0"/>
+          <p:cNvPr id="4" name="Text 0"/>
           <p:cNvSpPr/>
           <p:nvPr>
             <p:ph idx="102" type="body" hasCustomPrompt="1"/>
@@ -11403,7 +11093,1766 @@
             <a:pPr algn="l" indent="0" marL="0">
               <a:buNone/>
             </a:pPr>
+            <a:r>
+              <a:rPr lang="en-US" sz="1450" dirty="0">
+                <a:solidFill>
+                  <a:srgbClr val="44555A"/>
+                </a:solidFill>
+              </a:rPr>
+              <a:t>We have measured nothing, and we say so on every screen. But a model with no measurements can still be falsified — by asking whether its OUTPUTS land where real plants actually sit.</a:t>
+            </a:r>
             <a:endParaRPr lang="en-US" sz="1450" dirty="0"/>
+          </a:p>
+        </p:txBody>
+      </p:sp>
+      <p:sp>
+        <p:nvSpPr>
+          <p:cNvPr id="5" name="card-v-a"/>
+          <p:cNvSpPr/>
+          <p:nvPr/>
+        </p:nvSpPr>
+        <p:spPr>
+          <a:xfrm>
+            <a:off x="685800" y="2249424"/>
+            <a:ext cx="5230368" cy="1060704"/>
+          </a:xfrm>
+          <a:prstGeom prst="roundRect">
+            <a:avLst>
+              <a:gd name="adj" fmla="val 3448"/>
+            </a:avLst>
+          </a:prstGeom>
+          <a:solidFill>
+            <a:schemeClr val="bg2"/>
+          </a:solidFill>
+          <a:ln w="9525">
+            <a:solidFill>
+              <a:srgbClr val="DCE7E9"/>
+            </a:solidFill>
+            <a:prstDash val="solid"/>
+          </a:ln>
+        </p:spPr>
+      </p:sp>
+      <p:sp>
+        <p:nvSpPr>
+          <p:cNvPr id="6" name="v-ak"/>
+          <p:cNvSpPr txBox="1"/>
+          <p:nvPr/>
+        </p:nvSpPr>
+        <p:spPr>
+          <a:xfrm>
+            <a:off x="886968" y="2377440"/>
+            <a:ext cx="4828032" cy="201168"/>
+          </a:xfrm>
+          <a:prstGeom prst="rect">
+            <a:avLst/>
+          </a:prstGeom>
+          <a:noFill/>
+          <a:ln/>
+        </p:spPr>
+        <p:txBody>
+          <a:bodyPr wrap="square" lIns="0" tIns="0" rIns="0" bIns="0" rtlCol="0" anchor="ctr"/>
+          <a:lstStyle/>
+          <a:p>
+            <a:pPr indent="0" marL="0">
+              <a:buNone/>
+            </a:pPr>
+            <a:r>
+              <a:rPr lang="en-US" sz="950" b="1" spc="140" kern="0" dirty="0">
+                <a:solidFill>
+                  <a:srgbClr val="14525F"/>
+                </a:solidFill>
+              </a:rPr>
+              <a:t>FACT ONE · MEASURED BY CPCB</a:t>
+            </a:r>
+            <a:endParaRPr lang="en-US" sz="950" dirty="0"/>
+          </a:p>
+        </p:txBody>
+      </p:sp>
+      <p:sp>
+        <p:nvSpPr>
+          <p:cNvPr id="7" name="v-ab"/>
+          <p:cNvSpPr txBox="1"/>
+          <p:nvPr/>
+        </p:nvSpPr>
+        <p:spPr>
+          <a:xfrm>
+            <a:off x="886968" y="2606040"/>
+            <a:ext cx="4828032" cy="621792"/>
+          </a:xfrm>
+          <a:prstGeom prst="rect">
+            <a:avLst/>
+          </a:prstGeom>
+          <a:noFill/>
+          <a:ln/>
+        </p:spPr>
+        <p:txBody>
+          <a:bodyPr wrap="square" lIns="0" tIns="0" rIns="0" bIns="0" rtlCol="0" anchor="t"/>
+          <a:lstStyle/>
+          <a:p>
+            <a:pPr indent="0" marL="0">
+              <a:buNone/>
+            </a:pPr>
+            <a:r>
+              <a:rPr lang="en-US" sz="1200" dirty="0">
+                <a:solidFill>
+                  <a:srgbClr val="33474C"/>
+                </a:solidFill>
+              </a:rPr>
+              <a:t>18,340 mg/L of dissolved solids entering the evaporator at an assessed Tirupur dyeing unit.</a:t>
+            </a:r>
+            <a:endParaRPr lang="en-US" sz="1200" dirty="0"/>
+          </a:p>
+        </p:txBody>
+      </p:sp>
+      <p:sp>
+        <p:nvSpPr>
+          <p:cNvPr id="8" name="card-v-b"/>
+          <p:cNvSpPr/>
+          <p:nvPr/>
+        </p:nvSpPr>
+        <p:spPr>
+          <a:xfrm>
+            <a:off x="6245352" y="2249424"/>
+            <a:ext cx="5230368" cy="1060704"/>
+          </a:xfrm>
+          <a:prstGeom prst="roundRect">
+            <a:avLst>
+              <a:gd name="adj" fmla="val 3448"/>
+            </a:avLst>
+          </a:prstGeom>
+          <a:solidFill>
+            <a:schemeClr val="bg2"/>
+          </a:solidFill>
+          <a:ln w="9525">
+            <a:solidFill>
+              <a:srgbClr val="DCE7E9"/>
+            </a:solidFill>
+            <a:prstDash val="solid"/>
+          </a:ln>
+        </p:spPr>
+      </p:sp>
+      <p:sp>
+        <p:nvSpPr>
+          <p:cNvPr id="9" name="v-bk"/>
+          <p:cNvSpPr txBox="1"/>
+          <p:nvPr/>
+        </p:nvSpPr>
+        <p:spPr>
+          <a:xfrm>
+            <a:off x="6446520" y="2377440"/>
+            <a:ext cx="4828032" cy="201168"/>
+          </a:xfrm>
+          <a:prstGeom prst="rect">
+            <a:avLst/>
+          </a:prstGeom>
+          <a:noFill/>
+          <a:ln/>
+        </p:spPr>
+        <p:txBody>
+          <a:bodyPr wrap="square" lIns="0" tIns="0" rIns="0" bIns="0" rtlCol="0" anchor="ctr"/>
+          <a:lstStyle/>
+          <a:p>
+            <a:pPr indent="0" marL="0">
+              <a:buNone/>
+            </a:pPr>
+            <a:r>
+              <a:rPr lang="en-US" sz="950" b="1" spc="140" kern="0" dirty="0">
+                <a:solidFill>
+                  <a:srgbClr val="14525F"/>
+                </a:solidFill>
+              </a:rPr>
+              <a:t>FACT TWO · REPORTED BY OPERATORS</a:t>
+            </a:r>
+            <a:endParaRPr lang="en-US" sz="950" dirty="0"/>
+          </a:p>
+        </p:txBody>
+      </p:sp>
+      <p:sp>
+        <p:nvSpPr>
+          <p:cNvPr id="10" name="v-bb"/>
+          <p:cNvSpPr txBox="1"/>
+          <p:nvPr/>
+        </p:nvSpPr>
+        <p:spPr>
+          <a:xfrm>
+            <a:off x="6446520" y="2606040"/>
+            <a:ext cx="4828032" cy="621792"/>
+          </a:xfrm>
+          <a:prstGeom prst="rect">
+            <a:avLst/>
+          </a:prstGeom>
+          <a:noFill/>
+          <a:ln/>
+        </p:spPr>
+        <p:txBody>
+          <a:bodyPr wrap="square" lIns="0" tIns="0" rIns="0" bIns="0" rtlCol="0" anchor="t"/>
+          <a:lstStyle/>
+          <a:p>
+            <a:pPr indent="0" marL="0">
+              <a:buNone/>
+            </a:pPr>
+            <a:r>
+              <a:rPr lang="en-US" sz="1200" dirty="0">
+                <a:solidFill>
+                  <a:srgbClr val="33474C"/>
+                </a:solidFill>
+              </a:rPr>
+              <a:t>RO reject runs at 20 to 30 percent of inlet volume across Indian textile ZLD plants.</a:t>
+            </a:r>
+            <a:endParaRPr lang="en-US" sz="1200" dirty="0"/>
+          </a:p>
+        </p:txBody>
+      </p:sp>
+      <p:sp>
+        <p:nvSpPr>
+          <p:cNvPr id="11" name="v-bridge"/>
+          <p:cNvSpPr txBox="1"/>
+          <p:nvPr/>
+        </p:nvSpPr>
+        <p:spPr>
+          <a:xfrm>
+            <a:off x="685800" y="3419856"/>
+            <a:ext cx="10789920" cy="274320"/>
+          </a:xfrm>
+          <a:prstGeom prst="rect">
+            <a:avLst/>
+          </a:prstGeom>
+          <a:noFill/>
+          <a:ln/>
+        </p:spPr>
+        <p:txBody>
+          <a:bodyPr wrap="square" lIns="0" tIns="0" rIns="0" bIns="0" rtlCol="0" anchor="ctr"/>
+          <a:lstStyle/>
+          <a:p>
+            <a:pPr indent="0" marL="0">
+              <a:buNone/>
+            </a:pPr>
+            <a:r>
+              <a:rPr lang="en-US" sz="1250" b="1" dirty="0">
+                <a:solidFill>
+                  <a:srgbClr val="0E2127"/>
+                </a:solidFill>
+                <a:latin typeface="Cambria" pitchFamily="34" charset="0"/>
+                <a:ea typeface="Cambria" pitchFamily="34" charset="-122"/>
+                <a:cs typeface="Cambria" pitchFamily="34" charset="-120"/>
+              </a:rPr>
+              <a:t>Different sources. Neither one is an input to our engine. So we feed it the first and check whether it predicts the second.</a:t>
+            </a:r>
+            <a:endParaRPr lang="en-US" sz="1250" dirty="0"/>
+          </a:p>
+        </p:txBody>
+      </p:sp>
+      <p:graphicFrame>
+        <p:nvGraphicFramePr>
+          <p:cNvPr id="15" name="v-table"/>
+          <p:cNvGraphicFramePr>
+            <a:graphicFrameLocks noGrp="1"/>
+          </p:cNvGraphicFramePr>
+          <p:nvPr>
+            <p:extLst>
+              <p:ext uri="{D42A27DB-BD31-4B8C-83A1-F6EECF244321}">
+                <p14:modId xmlns:p14="http://schemas.microsoft.com/office/powerpoint/2010/main" val="1579011935"/>
+              </p:ext>
+            </p:extLst>
+          </p:nvPr>
+        </p:nvGraphicFramePr>
+        <p:xfrm>
+          <a:off x="685800" y="3767328"/>
+          <a:ext cx="10789920" cy="914400"/>
+        </p:xfrm>
+        <a:graphic>
+          <a:graphicData uri="http://schemas.openxmlformats.org/drawingml/2006/table">
+            <a:tbl>
+              <a:tblPr/>
+              <a:tblGrid>
+                <a:gridCol w="1920240"/>
+                <a:gridCol w="5029200"/>
+                <a:gridCol w="1920240"/>
+                <a:gridCol w="1920240"/>
+              </a:tblGrid>
+              <a:tr h="0">
+                <a:tc>
+                  <a:txBody>
+                    <a:bodyPr/>
+                    <a:lstStyle/>
+                    <a:p>
+                      <a:pPr algn="l" indent="0" marL="0">
+                        <a:buNone/>
+                      </a:pPr>
+                      <a:r>
+                        <a:rPr lang="en-US" sz="1000" b="1" spc="100" kern="0" dirty="0">
+                          <a:solidFill>
+                            <a:srgbClr val="6B8086"/>
+                          </a:solidFill>
+                          <a:latin typeface="Calibri" pitchFamily="34" charset="0"/>
+                          <a:ea typeface="Calibri" pitchFamily="34" charset="-122"/>
+                          <a:cs typeface="Calibri" pitchFamily="34" charset="-120"/>
+                        </a:rPr>
+                        <a:t>INLET TDS FED IN</a:t>
+                      </a:r>
+                      <a:endParaRPr lang="en-US" sz="1000" dirty="0">
+                        <a:latin typeface="Calibri" charset="0"/>
+                        <a:ea typeface="Calibri" charset="0"/>
+                        <a:cs typeface="Calibri" charset="0"/>
+                      </a:endParaRPr>
+                    </a:p>
+                  </a:txBody>
+                  <a:tcPr marL="0" marR="76200" marT="76200" marB="76200">
+                    <a:lnL w="0" cap="flat" cmpd="sng" algn="ctr">
+                      <a:solidFill>
+                        <a:srgbClr val="666666"/>
+                      </a:solidFill>
+                      <a:prstDash val="solid"/>
+                      <a:round/>
+                      <a:headEnd type="none" w="med" len="med"/>
+                      <a:tailEnd type="none" w="med" len="med"/>
+                    </a:lnL>
+                    <a:lnR w="0" cap="flat" cmpd="sng" algn="ctr">
+                      <a:solidFill>
+                        <a:srgbClr val="666666"/>
+                      </a:solidFill>
+                      <a:prstDash val="solid"/>
+                      <a:round/>
+                      <a:headEnd type="none" w="med" len="med"/>
+                      <a:tailEnd type="none" w="med" len="med"/>
+                    </a:lnR>
+                    <a:lnT w="0" cap="flat" cmpd="sng" algn="ctr">
+                      <a:solidFill>
+                        <a:srgbClr val="666666"/>
+                      </a:solidFill>
+                      <a:prstDash val="solid"/>
+                      <a:round/>
+                      <a:headEnd type="none" w="med" len="med"/>
+                      <a:tailEnd type="none" w="med" len="med"/>
+                    </a:lnT>
+                    <a:lnB w="12700" cap="flat" cmpd="sng" algn="ctr">
+                      <a:solidFill>
+                        <a:srgbClr val="C3D3D6"/>
+                      </a:solidFill>
+                      <a:prstDash val="solid"/>
+                      <a:round/>
+                      <a:headEnd type="none" w="med" len="med"/>
+                      <a:tailEnd type="none" w="med" len="med"/>
+                    </a:lnB>
+                    <a:solidFill>
+                      <a:srgbClr val="FFFFFF"/>
+                    </a:solidFill>
+                  </a:tcPr>
+                </a:tc>
+                <a:tc>
+                  <a:txBody>
+                    <a:bodyPr/>
+                    <a:lstStyle/>
+                    <a:p>
+                      <a:pPr algn="l" indent="0" marL="0">
+                        <a:buNone/>
+                      </a:pPr>
+                      <a:r>
+                        <a:rPr lang="en-US" sz="1000" b="1" spc="100" kern="0" dirty="0">
+                          <a:solidFill>
+                            <a:srgbClr val="6B8086"/>
+                          </a:solidFill>
+                          <a:latin typeface="Calibri" pitchFamily="34" charset="0"/>
+                          <a:ea typeface="Calibri" pitchFamily="34" charset="-122"/>
+                          <a:cs typeface="Calibri" pitchFamily="34" charset="-120"/>
+                        </a:rPr>
+                        <a:t>WHAT THAT NUMBER IS</a:t>
+                      </a:r>
+                      <a:endParaRPr lang="en-US" sz="1000" dirty="0">
+                        <a:latin typeface="Calibri" charset="0"/>
+                        <a:ea typeface="Calibri" charset="0"/>
+                        <a:cs typeface="Calibri" charset="0"/>
+                      </a:endParaRPr>
+                    </a:p>
+                  </a:txBody>
+                  <a:tcPr marL="0" marR="76200" marT="76200" marB="76200">
+                    <a:lnL w="0" cap="flat" cmpd="sng" algn="ctr">
+                      <a:solidFill>
+                        <a:srgbClr val="666666"/>
+                      </a:solidFill>
+                      <a:prstDash val="solid"/>
+                      <a:round/>
+                      <a:headEnd type="none" w="med" len="med"/>
+                      <a:tailEnd type="none" w="med" len="med"/>
+                    </a:lnL>
+                    <a:lnR w="0" cap="flat" cmpd="sng" algn="ctr">
+                      <a:solidFill>
+                        <a:srgbClr val="666666"/>
+                      </a:solidFill>
+                      <a:prstDash val="solid"/>
+                      <a:round/>
+                      <a:headEnd type="none" w="med" len="med"/>
+                      <a:tailEnd type="none" w="med" len="med"/>
+                    </a:lnR>
+                    <a:lnT w="0" cap="flat" cmpd="sng" algn="ctr">
+                      <a:solidFill>
+                        <a:srgbClr val="666666"/>
+                      </a:solidFill>
+                      <a:prstDash val="solid"/>
+                      <a:round/>
+                      <a:headEnd type="none" w="med" len="med"/>
+                      <a:tailEnd type="none" w="med" len="med"/>
+                    </a:lnT>
+                    <a:lnB w="12700" cap="flat" cmpd="sng" algn="ctr">
+                      <a:solidFill>
+                        <a:srgbClr val="C3D3D6"/>
+                      </a:solidFill>
+                      <a:prstDash val="solid"/>
+                      <a:round/>
+                      <a:headEnd type="none" w="med" len="med"/>
+                      <a:tailEnd type="none" w="med" len="med"/>
+                    </a:lnB>
+                    <a:solidFill>
+                      <a:srgbClr val="FFFFFF"/>
+                    </a:solidFill>
+                  </a:tcPr>
+                </a:tc>
+                <a:tc>
+                  <a:txBody>
+                    <a:bodyPr/>
+                    <a:lstStyle/>
+                    <a:p>
+                      <a:pPr algn="r" indent="0" marL="0">
+                        <a:buNone/>
+                      </a:pPr>
+                      <a:r>
+                        <a:rPr lang="en-US" sz="1000" b="1" spc="100" kern="0" dirty="0">
+                          <a:solidFill>
+                            <a:srgbClr val="6B8086"/>
+                          </a:solidFill>
+                          <a:latin typeface="Calibri" pitchFamily="34" charset="0"/>
+                          <a:ea typeface="Calibri" pitchFamily="34" charset="-122"/>
+                          <a:cs typeface="Calibri" pitchFamily="34" charset="-120"/>
+                        </a:rPr>
+                        <a:t>MODEL PREDICTS</a:t>
+                      </a:r>
+                      <a:endParaRPr lang="en-US" sz="1000" dirty="0">
+                        <a:latin typeface="Calibri" charset="0"/>
+                        <a:ea typeface="Calibri" charset="0"/>
+                        <a:cs typeface="Calibri" charset="0"/>
+                      </a:endParaRPr>
+                    </a:p>
+                  </a:txBody>
+                  <a:tcPr marL="0" marR="76200" marT="76200" marB="76200">
+                    <a:lnL w="0" cap="flat" cmpd="sng" algn="ctr">
+                      <a:solidFill>
+                        <a:srgbClr val="666666"/>
+                      </a:solidFill>
+                      <a:prstDash val="solid"/>
+                      <a:round/>
+                      <a:headEnd type="none" w="med" len="med"/>
+                      <a:tailEnd type="none" w="med" len="med"/>
+                    </a:lnL>
+                    <a:lnR w="0" cap="flat" cmpd="sng" algn="ctr">
+                      <a:solidFill>
+                        <a:srgbClr val="666666"/>
+                      </a:solidFill>
+                      <a:prstDash val="solid"/>
+                      <a:round/>
+                      <a:headEnd type="none" w="med" len="med"/>
+                      <a:tailEnd type="none" w="med" len="med"/>
+                    </a:lnR>
+                    <a:lnT w="0" cap="flat" cmpd="sng" algn="ctr">
+                      <a:solidFill>
+                        <a:srgbClr val="666666"/>
+                      </a:solidFill>
+                      <a:prstDash val="solid"/>
+                      <a:round/>
+                      <a:headEnd type="none" w="med" len="med"/>
+                      <a:tailEnd type="none" w="med" len="med"/>
+                    </a:lnT>
+                    <a:lnB w="12700" cap="flat" cmpd="sng" algn="ctr">
+                      <a:solidFill>
+                        <a:srgbClr val="C3D3D6"/>
+                      </a:solidFill>
+                      <a:prstDash val="solid"/>
+                      <a:round/>
+                      <a:headEnd type="none" w="med" len="med"/>
+                      <a:tailEnd type="none" w="med" len="med"/>
+                    </a:lnB>
+                    <a:solidFill>
+                      <a:srgbClr val="FFFFFF"/>
+                    </a:solidFill>
+                  </a:tcPr>
+                </a:tc>
+                <a:tc>
+                  <a:txBody>
+                    <a:bodyPr/>
+                    <a:lstStyle/>
+                    <a:p>
+                      <a:pPr algn="r" indent="0" marL="0">
+                        <a:buNone/>
+                      </a:pPr>
+                      <a:r>
+                        <a:rPr lang="en-US" sz="1000" b="1" spc="100" kern="0" dirty="0">
+                          <a:solidFill>
+                            <a:srgbClr val="6B8086"/>
+                          </a:solidFill>
+                          <a:latin typeface="Calibri" pitchFamily="34" charset="0"/>
+                          <a:ea typeface="Calibri" pitchFamily="34" charset="-122"/>
+                          <a:cs typeface="Calibri" pitchFamily="34" charset="-120"/>
+                        </a:rPr>
+                        <a:t>VERDICT</a:t>
+                      </a:r>
+                      <a:endParaRPr lang="en-US" sz="1000" dirty="0">
+                        <a:latin typeface="Calibri" charset="0"/>
+                        <a:ea typeface="Calibri" charset="0"/>
+                        <a:cs typeface="Calibri" charset="0"/>
+                      </a:endParaRPr>
+                    </a:p>
+                  </a:txBody>
+                  <a:tcPr marL="0" marR="76200" marT="76200" marB="76200">
+                    <a:lnL w="0" cap="flat" cmpd="sng" algn="ctr">
+                      <a:solidFill>
+                        <a:srgbClr val="666666"/>
+                      </a:solidFill>
+                      <a:prstDash val="solid"/>
+                      <a:round/>
+                      <a:headEnd type="none" w="med" len="med"/>
+                      <a:tailEnd type="none" w="med" len="med"/>
+                    </a:lnL>
+                    <a:lnR w="0" cap="flat" cmpd="sng" algn="ctr">
+                      <a:solidFill>
+                        <a:srgbClr val="666666"/>
+                      </a:solidFill>
+                      <a:prstDash val="solid"/>
+                      <a:round/>
+                      <a:headEnd type="none" w="med" len="med"/>
+                      <a:tailEnd type="none" w="med" len="med"/>
+                    </a:lnR>
+                    <a:lnT w="0" cap="flat" cmpd="sng" algn="ctr">
+                      <a:solidFill>
+                        <a:srgbClr val="666666"/>
+                      </a:solidFill>
+                      <a:prstDash val="solid"/>
+                      <a:round/>
+                      <a:headEnd type="none" w="med" len="med"/>
+                      <a:tailEnd type="none" w="med" len="med"/>
+                    </a:lnT>
+                    <a:lnB w="12700" cap="flat" cmpd="sng" algn="ctr">
+                      <a:solidFill>
+                        <a:srgbClr val="C3D3D6"/>
+                      </a:solidFill>
+                      <a:prstDash val="solid"/>
+                      <a:round/>
+                      <a:headEnd type="none" w="med" len="med"/>
+                      <a:tailEnd type="none" w="med" len="med"/>
+                    </a:lnB>
+                    <a:solidFill>
+                      <a:srgbClr val="FFFFFF"/>
+                    </a:solidFill>
+                  </a:tcPr>
+                </a:tc>
+              </a:tr>
+              <a:tr h="0">
+                <a:tc>
+                  <a:txBody>
+                    <a:bodyPr/>
+                    <a:lstStyle/>
+                    <a:p>
+                      <a:pPr algn="l" indent="0" marL="0">
+                        <a:buNone/>
+                      </a:pPr>
+                      <a:r>
+                        <a:rPr lang="en-US" sz="1200" b="1" dirty="0">
+                          <a:solidFill>
+                            <a:srgbClr val="0E2127"/>
+                          </a:solidFill>
+                          <a:latin typeface="Calibri" pitchFamily="34" charset="0"/>
+                          <a:ea typeface="Calibri" pitchFamily="34" charset="-122"/>
+                          <a:cs typeface="Calibri" pitchFamily="34" charset="-120"/>
+                        </a:rPr>
+                        <a:t>12,000 mg/L</a:t>
+                      </a:r>
+                      <a:endParaRPr lang="en-US" sz="1200" dirty="0">
+                        <a:latin typeface="Calibri" charset="0"/>
+                        <a:ea typeface="Calibri" charset="0"/>
+                        <a:cs typeface="Calibri" charset="0"/>
+                      </a:endParaRPr>
+                    </a:p>
+                  </a:txBody>
+                  <a:tcPr marL="0" marR="76200" marT="88900" marB="88900">
+                    <a:lnL w="0" cap="flat" cmpd="sng" algn="ctr">
+                      <a:solidFill>
+                        <a:srgbClr val="666666"/>
+                      </a:solidFill>
+                      <a:prstDash val="solid"/>
+                      <a:round/>
+                      <a:headEnd type="none" w="med" len="med"/>
+                      <a:tailEnd type="none" w="med" len="med"/>
+                    </a:lnL>
+                    <a:lnR w="0" cap="flat" cmpd="sng" algn="ctr">
+                      <a:solidFill>
+                        <a:srgbClr val="666666"/>
+                      </a:solidFill>
+                      <a:prstDash val="solid"/>
+                      <a:round/>
+                      <a:headEnd type="none" w="med" len="med"/>
+                      <a:tailEnd type="none" w="med" len="med"/>
+                    </a:lnR>
+                    <a:lnT w="0" cap="flat" cmpd="sng" algn="ctr">
+                      <a:solidFill>
+                        <a:srgbClr val="666666"/>
+                      </a:solidFill>
+                      <a:prstDash val="solid"/>
+                      <a:round/>
+                      <a:headEnd type="none" w="med" len="med"/>
+                      <a:tailEnd type="none" w="med" len="med"/>
+                    </a:lnT>
+                    <a:lnB w="6350" cap="flat" cmpd="sng" algn="ctr">
+                      <a:solidFill>
+                        <a:srgbClr val="E6EEEF"/>
+                      </a:solidFill>
+                      <a:prstDash val="solid"/>
+                      <a:round/>
+                      <a:headEnd type="none" w="med" len="med"/>
+                      <a:tailEnd type="none" w="med" len="med"/>
+                    </a:lnB>
+                    <a:solidFill>
+                      <a:srgbClr val="FFFFFF"/>
+                    </a:solidFill>
+                  </a:tcPr>
+                </a:tc>
+                <a:tc>
+                  <a:txBody>
+                    <a:bodyPr/>
+                    <a:lstStyle/>
+                    <a:p>
+                      <a:pPr algn="l" indent="0" marL="0">
+                        <a:buNone/>
+                      </a:pPr>
+                      <a:r>
+                        <a:rPr lang="en-US" sz="1200" dirty="0">
+                          <a:solidFill>
+                            <a:srgbClr val="33474C"/>
+                          </a:solidFill>
+                          <a:latin typeface="Calibri" pitchFamily="34" charset="0"/>
+                          <a:ea typeface="Calibri" pitchFamily="34" charset="-122"/>
+                          <a:cs typeface="Calibri" pitchFamily="34" charset="-120"/>
+                        </a:rPr>
+                        <a:t>Lower end of observed CETP inlet strength</a:t>
+                      </a:r>
+                      <a:endParaRPr lang="en-US" sz="1200" dirty="0">
+                        <a:latin typeface="Calibri" charset="0"/>
+                        <a:ea typeface="Calibri" charset="0"/>
+                        <a:cs typeface="Calibri" charset="0"/>
+                      </a:endParaRPr>
+                    </a:p>
+                  </a:txBody>
+                  <a:tcPr marL="0" marR="76200" marT="88900" marB="88900">
+                    <a:lnL w="0" cap="flat" cmpd="sng" algn="ctr">
+                      <a:solidFill>
+                        <a:srgbClr val="666666"/>
+                      </a:solidFill>
+                      <a:prstDash val="solid"/>
+                      <a:round/>
+                      <a:headEnd type="none" w="med" len="med"/>
+                      <a:tailEnd type="none" w="med" len="med"/>
+                    </a:lnL>
+                    <a:lnR w="0" cap="flat" cmpd="sng" algn="ctr">
+                      <a:solidFill>
+                        <a:srgbClr val="666666"/>
+                      </a:solidFill>
+                      <a:prstDash val="solid"/>
+                      <a:round/>
+                      <a:headEnd type="none" w="med" len="med"/>
+                      <a:tailEnd type="none" w="med" len="med"/>
+                    </a:lnR>
+                    <a:lnT w="0" cap="flat" cmpd="sng" algn="ctr">
+                      <a:solidFill>
+                        <a:srgbClr val="666666"/>
+                      </a:solidFill>
+                      <a:prstDash val="solid"/>
+                      <a:round/>
+                      <a:headEnd type="none" w="med" len="med"/>
+                      <a:tailEnd type="none" w="med" len="med"/>
+                    </a:lnT>
+                    <a:lnB w="6350" cap="flat" cmpd="sng" algn="ctr">
+                      <a:solidFill>
+                        <a:srgbClr val="E6EEEF"/>
+                      </a:solidFill>
+                      <a:prstDash val="solid"/>
+                      <a:round/>
+                      <a:headEnd type="none" w="med" len="med"/>
+                      <a:tailEnd type="none" w="med" len="med"/>
+                    </a:lnB>
+                    <a:solidFill>
+                      <a:srgbClr val="FFFFFF"/>
+                    </a:solidFill>
+                  </a:tcPr>
+                </a:tc>
+                <a:tc>
+                  <a:txBody>
+                    <a:bodyPr/>
+                    <a:lstStyle/>
+                    <a:p>
+                      <a:pPr algn="r" indent="0" marL="0">
+                        <a:buNone/>
+                      </a:pPr>
+                      <a:r>
+                        <a:rPr lang="en-US" sz="1200" dirty="0">
+                          <a:solidFill>
+                            <a:srgbClr val="33474C"/>
+                          </a:solidFill>
+                          <a:latin typeface="Calibri" pitchFamily="34" charset="0"/>
+                          <a:ea typeface="Calibri" pitchFamily="34" charset="-122"/>
+                          <a:cs typeface="Calibri" pitchFamily="34" charset="-120"/>
+                        </a:rPr>
+                        <a:t>20%</a:t>
+                      </a:r>
+                      <a:endParaRPr lang="en-US" sz="1200" dirty="0">
+                        <a:latin typeface="Calibri" charset="0"/>
+                        <a:ea typeface="Calibri" charset="0"/>
+                        <a:cs typeface="Calibri" charset="0"/>
+                      </a:endParaRPr>
+                    </a:p>
+                  </a:txBody>
+                  <a:tcPr marL="0" marR="76200" marT="88900" marB="88900">
+                    <a:lnL w="0" cap="flat" cmpd="sng" algn="ctr">
+                      <a:solidFill>
+                        <a:srgbClr val="666666"/>
+                      </a:solidFill>
+                      <a:prstDash val="solid"/>
+                      <a:round/>
+                      <a:headEnd type="none" w="med" len="med"/>
+                      <a:tailEnd type="none" w="med" len="med"/>
+                    </a:lnL>
+                    <a:lnR w="0" cap="flat" cmpd="sng" algn="ctr">
+                      <a:solidFill>
+                        <a:srgbClr val="666666"/>
+                      </a:solidFill>
+                      <a:prstDash val="solid"/>
+                      <a:round/>
+                      <a:headEnd type="none" w="med" len="med"/>
+                      <a:tailEnd type="none" w="med" len="med"/>
+                    </a:lnR>
+                    <a:lnT w="0" cap="flat" cmpd="sng" algn="ctr">
+                      <a:solidFill>
+                        <a:srgbClr val="666666"/>
+                      </a:solidFill>
+                      <a:prstDash val="solid"/>
+                      <a:round/>
+                      <a:headEnd type="none" w="med" len="med"/>
+                      <a:tailEnd type="none" w="med" len="med"/>
+                    </a:lnT>
+                    <a:lnB w="6350" cap="flat" cmpd="sng" algn="ctr">
+                      <a:solidFill>
+                        <a:srgbClr val="E6EEEF"/>
+                      </a:solidFill>
+                      <a:prstDash val="solid"/>
+                      <a:round/>
+                      <a:headEnd type="none" w="med" len="med"/>
+                      <a:tailEnd type="none" w="med" len="med"/>
+                    </a:lnB>
+                    <a:solidFill>
+                      <a:srgbClr val="FFFFFF"/>
+                    </a:solidFill>
+                  </a:tcPr>
+                </a:tc>
+                <a:tc>
+                  <a:txBody>
+                    <a:bodyPr/>
+                    <a:lstStyle/>
+                    <a:p>
+                      <a:pPr algn="r" indent="0" marL="0">
+                        <a:buNone/>
+                      </a:pPr>
+                      <a:r>
+                        <a:rPr lang="en-US" sz="1200" dirty="0">
+                          <a:solidFill>
+                            <a:srgbClr val="33474C"/>
+                          </a:solidFill>
+                          <a:latin typeface="Calibri" pitchFamily="34" charset="0"/>
+                          <a:ea typeface="Calibri" pitchFamily="34" charset="-122"/>
+                          <a:cs typeface="Calibri" pitchFamily="34" charset="-120"/>
+                        </a:rPr>
+                        <a:t>inside 20–30%</a:t>
+                      </a:r>
+                      <a:endParaRPr lang="en-US" sz="1200" dirty="0">
+                        <a:latin typeface="Calibri" charset="0"/>
+                        <a:ea typeface="Calibri" charset="0"/>
+                        <a:cs typeface="Calibri" charset="0"/>
+                      </a:endParaRPr>
+                    </a:p>
+                  </a:txBody>
+                  <a:tcPr marL="0" marR="76200" marT="88900" marB="88900">
+                    <a:lnL w="0" cap="flat" cmpd="sng" algn="ctr">
+                      <a:solidFill>
+                        <a:srgbClr val="666666"/>
+                      </a:solidFill>
+                      <a:prstDash val="solid"/>
+                      <a:round/>
+                      <a:headEnd type="none" w="med" len="med"/>
+                      <a:tailEnd type="none" w="med" len="med"/>
+                    </a:lnL>
+                    <a:lnR w="0" cap="flat" cmpd="sng" algn="ctr">
+                      <a:solidFill>
+                        <a:srgbClr val="666666"/>
+                      </a:solidFill>
+                      <a:prstDash val="solid"/>
+                      <a:round/>
+                      <a:headEnd type="none" w="med" len="med"/>
+                      <a:tailEnd type="none" w="med" len="med"/>
+                    </a:lnR>
+                    <a:lnT w="0" cap="flat" cmpd="sng" algn="ctr">
+                      <a:solidFill>
+                        <a:srgbClr val="666666"/>
+                      </a:solidFill>
+                      <a:prstDash val="solid"/>
+                      <a:round/>
+                      <a:headEnd type="none" w="med" len="med"/>
+                      <a:tailEnd type="none" w="med" len="med"/>
+                    </a:lnT>
+                    <a:lnB w="6350" cap="flat" cmpd="sng" algn="ctr">
+                      <a:solidFill>
+                        <a:srgbClr val="E6EEEF"/>
+                      </a:solidFill>
+                      <a:prstDash val="solid"/>
+                      <a:round/>
+                      <a:headEnd type="none" w="med" len="med"/>
+                      <a:tailEnd type="none" w="med" len="med"/>
+                    </a:lnB>
+                    <a:solidFill>
+                      <a:srgbClr val="FFFFFF"/>
+                    </a:solidFill>
+                  </a:tcPr>
+                </a:tc>
+              </a:tr>
+              <a:tr h="0">
+                <a:tc>
+                  <a:txBody>
+                    <a:bodyPr/>
+                    <a:lstStyle/>
+                    <a:p>
+                      <a:pPr algn="l" indent="0" marL="0">
+                        <a:buNone/>
+                      </a:pPr>
+                      <a:r>
+                        <a:rPr lang="en-US" sz="1200" b="1" dirty="0">
+                          <a:solidFill>
+                            <a:srgbClr val="0E2127"/>
+                          </a:solidFill>
+                          <a:latin typeface="Calibri" pitchFamily="34" charset="0"/>
+                          <a:ea typeface="Calibri" pitchFamily="34" charset="-122"/>
+                          <a:cs typeface="Calibri" pitchFamily="34" charset="-120"/>
+                        </a:rPr>
+                        <a:t>15,000 mg/L</a:t>
+                      </a:r>
+                      <a:endParaRPr lang="en-US" sz="1200" dirty="0">
+                        <a:latin typeface="Calibri" charset="0"/>
+                        <a:ea typeface="Calibri" charset="0"/>
+                        <a:cs typeface="Calibri" charset="0"/>
+                      </a:endParaRPr>
+                    </a:p>
+                  </a:txBody>
+                  <a:tcPr marL="0" marR="76200" marT="88900" marB="88900">
+                    <a:lnL w="0" cap="flat" cmpd="sng" algn="ctr">
+                      <a:solidFill>
+                        <a:srgbClr val="666666"/>
+                      </a:solidFill>
+                      <a:prstDash val="solid"/>
+                      <a:round/>
+                      <a:headEnd type="none" w="med" len="med"/>
+                      <a:tailEnd type="none" w="med" len="med"/>
+                    </a:lnL>
+                    <a:lnR w="0" cap="flat" cmpd="sng" algn="ctr">
+                      <a:solidFill>
+                        <a:srgbClr val="666666"/>
+                      </a:solidFill>
+                      <a:prstDash val="solid"/>
+                      <a:round/>
+                      <a:headEnd type="none" w="med" len="med"/>
+                      <a:tailEnd type="none" w="med" len="med"/>
+                    </a:lnR>
+                    <a:lnT w="0" cap="flat" cmpd="sng" algn="ctr">
+                      <a:solidFill>
+                        <a:srgbClr val="666666"/>
+                      </a:solidFill>
+                      <a:prstDash val="solid"/>
+                      <a:round/>
+                      <a:headEnd type="none" w="med" len="med"/>
+                      <a:tailEnd type="none" w="med" len="med"/>
+                    </a:lnT>
+                    <a:lnB w="6350" cap="flat" cmpd="sng" algn="ctr">
+                      <a:solidFill>
+                        <a:srgbClr val="E6EEEF"/>
+                      </a:solidFill>
+                      <a:prstDash val="solid"/>
+                      <a:round/>
+                      <a:headEnd type="none" w="med" len="med"/>
+                      <a:tailEnd type="none" w="med" len="med"/>
+                    </a:lnB>
+                    <a:solidFill>
+                      <a:srgbClr val="FFFFFF"/>
+                    </a:solidFill>
+                  </a:tcPr>
+                </a:tc>
+                <a:tc>
+                  <a:txBody>
+                    <a:bodyPr/>
+                    <a:lstStyle/>
+                    <a:p>
+                      <a:pPr algn="l" indent="0" marL="0">
+                        <a:buNone/>
+                      </a:pPr>
+                      <a:r>
+                        <a:rPr lang="en-US" sz="1200" dirty="0">
+                          <a:solidFill>
+                            <a:srgbClr val="33474C"/>
+                          </a:solidFill>
+                          <a:latin typeface="Calibri" pitchFamily="34" charset="0"/>
+                          <a:ea typeface="Calibri" pitchFamily="34" charset="-122"/>
+                          <a:cs typeface="Calibri" pitchFamily="34" charset="-120"/>
+                        </a:rPr>
+                        <a:t>Midpoint of observed CETP inlet strength</a:t>
+                      </a:r>
+                      <a:endParaRPr lang="en-US" sz="1200" dirty="0">
+                        <a:latin typeface="Calibri" charset="0"/>
+                        <a:ea typeface="Calibri" charset="0"/>
+                        <a:cs typeface="Calibri" charset="0"/>
+                      </a:endParaRPr>
+                    </a:p>
+                  </a:txBody>
+                  <a:tcPr marL="0" marR="76200" marT="88900" marB="88900">
+                    <a:lnL w="0" cap="flat" cmpd="sng" algn="ctr">
+                      <a:solidFill>
+                        <a:srgbClr val="666666"/>
+                      </a:solidFill>
+                      <a:prstDash val="solid"/>
+                      <a:round/>
+                      <a:headEnd type="none" w="med" len="med"/>
+                      <a:tailEnd type="none" w="med" len="med"/>
+                    </a:lnL>
+                    <a:lnR w="0" cap="flat" cmpd="sng" algn="ctr">
+                      <a:solidFill>
+                        <a:srgbClr val="666666"/>
+                      </a:solidFill>
+                      <a:prstDash val="solid"/>
+                      <a:round/>
+                      <a:headEnd type="none" w="med" len="med"/>
+                      <a:tailEnd type="none" w="med" len="med"/>
+                    </a:lnR>
+                    <a:lnT w="0" cap="flat" cmpd="sng" algn="ctr">
+                      <a:solidFill>
+                        <a:srgbClr val="666666"/>
+                      </a:solidFill>
+                      <a:prstDash val="solid"/>
+                      <a:round/>
+                      <a:headEnd type="none" w="med" len="med"/>
+                      <a:tailEnd type="none" w="med" len="med"/>
+                    </a:lnT>
+                    <a:lnB w="6350" cap="flat" cmpd="sng" algn="ctr">
+                      <a:solidFill>
+                        <a:srgbClr val="E6EEEF"/>
+                      </a:solidFill>
+                      <a:prstDash val="solid"/>
+                      <a:round/>
+                      <a:headEnd type="none" w="med" len="med"/>
+                      <a:tailEnd type="none" w="med" len="med"/>
+                    </a:lnB>
+                    <a:solidFill>
+                      <a:srgbClr val="FFFFFF"/>
+                    </a:solidFill>
+                  </a:tcPr>
+                </a:tc>
+                <a:tc>
+                  <a:txBody>
+                    <a:bodyPr/>
+                    <a:lstStyle/>
+                    <a:p>
+                      <a:pPr algn="r" indent="0" marL="0">
+                        <a:buNone/>
+                      </a:pPr>
+                      <a:r>
+                        <a:rPr lang="en-US" sz="1200" dirty="0">
+                          <a:solidFill>
+                            <a:srgbClr val="33474C"/>
+                          </a:solidFill>
+                          <a:latin typeface="Calibri" pitchFamily="34" charset="0"/>
+                          <a:ea typeface="Calibri" pitchFamily="34" charset="-122"/>
+                          <a:cs typeface="Calibri" pitchFamily="34" charset="-120"/>
+                        </a:rPr>
+                        <a:t>25%</a:t>
+                      </a:r>
+                      <a:endParaRPr lang="en-US" sz="1200" dirty="0">
+                        <a:latin typeface="Calibri" charset="0"/>
+                        <a:ea typeface="Calibri" charset="0"/>
+                        <a:cs typeface="Calibri" charset="0"/>
+                      </a:endParaRPr>
+                    </a:p>
+                  </a:txBody>
+                  <a:tcPr marL="0" marR="76200" marT="88900" marB="88900">
+                    <a:lnL w="0" cap="flat" cmpd="sng" algn="ctr">
+                      <a:solidFill>
+                        <a:srgbClr val="666666"/>
+                      </a:solidFill>
+                      <a:prstDash val="solid"/>
+                      <a:round/>
+                      <a:headEnd type="none" w="med" len="med"/>
+                      <a:tailEnd type="none" w="med" len="med"/>
+                    </a:lnL>
+                    <a:lnR w="0" cap="flat" cmpd="sng" algn="ctr">
+                      <a:solidFill>
+                        <a:srgbClr val="666666"/>
+                      </a:solidFill>
+                      <a:prstDash val="solid"/>
+                      <a:round/>
+                      <a:headEnd type="none" w="med" len="med"/>
+                      <a:tailEnd type="none" w="med" len="med"/>
+                    </a:lnR>
+                    <a:lnT w="0" cap="flat" cmpd="sng" algn="ctr">
+                      <a:solidFill>
+                        <a:srgbClr val="666666"/>
+                      </a:solidFill>
+                      <a:prstDash val="solid"/>
+                      <a:round/>
+                      <a:headEnd type="none" w="med" len="med"/>
+                      <a:tailEnd type="none" w="med" len="med"/>
+                    </a:lnT>
+                    <a:lnB w="6350" cap="flat" cmpd="sng" algn="ctr">
+                      <a:solidFill>
+                        <a:srgbClr val="E6EEEF"/>
+                      </a:solidFill>
+                      <a:prstDash val="solid"/>
+                      <a:round/>
+                      <a:headEnd type="none" w="med" len="med"/>
+                      <a:tailEnd type="none" w="med" len="med"/>
+                    </a:lnB>
+                    <a:solidFill>
+                      <a:srgbClr val="FFFFFF"/>
+                    </a:solidFill>
+                  </a:tcPr>
+                </a:tc>
+                <a:tc>
+                  <a:txBody>
+                    <a:bodyPr/>
+                    <a:lstStyle/>
+                    <a:p>
+                      <a:pPr algn="r" indent="0" marL="0">
+                        <a:buNone/>
+                      </a:pPr>
+                      <a:r>
+                        <a:rPr lang="en-US" sz="1200" dirty="0">
+                          <a:solidFill>
+                            <a:srgbClr val="33474C"/>
+                          </a:solidFill>
+                          <a:latin typeface="Calibri" pitchFamily="34" charset="0"/>
+                          <a:ea typeface="Calibri" pitchFamily="34" charset="-122"/>
+                          <a:cs typeface="Calibri" pitchFamily="34" charset="-120"/>
+                        </a:rPr>
+                        <a:t>inside 20–30%</a:t>
+                      </a:r>
+                      <a:endParaRPr lang="en-US" sz="1200" dirty="0">
+                        <a:latin typeface="Calibri" charset="0"/>
+                        <a:ea typeface="Calibri" charset="0"/>
+                        <a:cs typeface="Calibri" charset="0"/>
+                      </a:endParaRPr>
+                    </a:p>
+                  </a:txBody>
+                  <a:tcPr marL="0" marR="76200" marT="88900" marB="88900">
+                    <a:lnL w="0" cap="flat" cmpd="sng" algn="ctr">
+                      <a:solidFill>
+                        <a:srgbClr val="666666"/>
+                      </a:solidFill>
+                      <a:prstDash val="solid"/>
+                      <a:round/>
+                      <a:headEnd type="none" w="med" len="med"/>
+                      <a:tailEnd type="none" w="med" len="med"/>
+                    </a:lnL>
+                    <a:lnR w="0" cap="flat" cmpd="sng" algn="ctr">
+                      <a:solidFill>
+                        <a:srgbClr val="666666"/>
+                      </a:solidFill>
+                      <a:prstDash val="solid"/>
+                      <a:round/>
+                      <a:headEnd type="none" w="med" len="med"/>
+                      <a:tailEnd type="none" w="med" len="med"/>
+                    </a:lnR>
+                    <a:lnT w="0" cap="flat" cmpd="sng" algn="ctr">
+                      <a:solidFill>
+                        <a:srgbClr val="666666"/>
+                      </a:solidFill>
+                      <a:prstDash val="solid"/>
+                      <a:round/>
+                      <a:headEnd type="none" w="med" len="med"/>
+                      <a:tailEnd type="none" w="med" len="med"/>
+                    </a:lnT>
+                    <a:lnB w="6350" cap="flat" cmpd="sng" algn="ctr">
+                      <a:solidFill>
+                        <a:srgbClr val="E6EEEF"/>
+                      </a:solidFill>
+                      <a:prstDash val="solid"/>
+                      <a:round/>
+                      <a:headEnd type="none" w="med" len="med"/>
+                      <a:tailEnd type="none" w="med" len="med"/>
+                    </a:lnB>
+                    <a:solidFill>
+                      <a:srgbClr val="FFFFFF"/>
+                    </a:solidFill>
+                  </a:tcPr>
+                </a:tc>
+              </a:tr>
+              <a:tr h="0">
+                <a:tc>
+                  <a:txBody>
+                    <a:bodyPr/>
+                    <a:lstStyle/>
+                    <a:p>
+                      <a:pPr algn="l" indent="0" marL="0">
+                        <a:buNone/>
+                      </a:pPr>
+                      <a:r>
+                        <a:rPr lang="en-US" sz="1300" b="1" dirty="0">
+                          <a:solidFill>
+                            <a:srgbClr val="0E2127"/>
+                          </a:solidFill>
+                          <a:latin typeface="Calibri" pitchFamily="34" charset="0"/>
+                          <a:ea typeface="Calibri" pitchFamily="34" charset="-122"/>
+                          <a:cs typeface="Calibri" pitchFamily="34" charset="-120"/>
+                        </a:rPr>
+                        <a:t>18,340 mg/L</a:t>
+                      </a:r>
+                      <a:endParaRPr lang="en-US" sz="1300" dirty="0">
+                        <a:latin typeface="Calibri" charset="0"/>
+                        <a:ea typeface="Calibri" charset="0"/>
+                        <a:cs typeface="Calibri" charset="0"/>
+                      </a:endParaRPr>
+                    </a:p>
+                  </a:txBody>
+                  <a:tcPr marL="0" marR="76200" marT="88900" marB="88900">
+                    <a:lnL w="0" cap="flat" cmpd="sng" algn="ctr">
+                      <a:solidFill>
+                        <a:srgbClr val="666666"/>
+                      </a:solidFill>
+                      <a:prstDash val="solid"/>
+                      <a:round/>
+                      <a:headEnd type="none" w="med" len="med"/>
+                      <a:tailEnd type="none" w="med" len="med"/>
+                    </a:lnL>
+                    <a:lnR w="0" cap="flat" cmpd="sng" algn="ctr">
+                      <a:solidFill>
+                        <a:srgbClr val="666666"/>
+                      </a:solidFill>
+                      <a:prstDash val="solid"/>
+                      <a:round/>
+                      <a:headEnd type="none" w="med" len="med"/>
+                      <a:tailEnd type="none" w="med" len="med"/>
+                    </a:lnR>
+                    <a:lnT w="0" cap="flat" cmpd="sng" algn="ctr">
+                      <a:solidFill>
+                        <a:srgbClr val="666666"/>
+                      </a:solidFill>
+                      <a:prstDash val="solid"/>
+                      <a:round/>
+                      <a:headEnd type="none" w="med" len="med"/>
+                      <a:tailEnd type="none" w="med" len="med"/>
+                    </a:lnT>
+                    <a:lnB w="6350" cap="flat" cmpd="sng" algn="ctr">
+                      <a:solidFill>
+                        <a:srgbClr val="E6EEEF"/>
+                      </a:solidFill>
+                      <a:prstDash val="solid"/>
+                      <a:round/>
+                      <a:headEnd type="none" w="med" len="med"/>
+                      <a:tailEnd type="none" w="med" len="med"/>
+                    </a:lnB>
+                    <a:solidFill>
+                      <a:srgbClr val="F2F7F3"/>
+                    </a:solidFill>
+                  </a:tcPr>
+                </a:tc>
+                <a:tc>
+                  <a:txBody>
+                    <a:bodyPr/>
+                    <a:lstStyle/>
+                    <a:p>
+                      <a:pPr algn="l" indent="0" marL="0">
+                        <a:buNone/>
+                      </a:pPr>
+                      <a:r>
+                        <a:rPr lang="en-US" sz="1300" b="1" dirty="0">
+                          <a:solidFill>
+                            <a:srgbClr val="33474C"/>
+                          </a:solidFill>
+                          <a:latin typeface="Calibri" pitchFamily="34" charset="0"/>
+                          <a:ea typeface="Calibri" pitchFamily="34" charset="-122"/>
+                          <a:cs typeface="Calibri" pitchFamily="34" charset="-120"/>
+                        </a:rPr>
+                        <a:t>TDS measured by CPCB entering evaporation at an assessed Tirupur unit</a:t>
+                      </a:r>
+                      <a:endParaRPr lang="en-US" sz="1300" dirty="0">
+                        <a:latin typeface="Calibri" charset="0"/>
+                        <a:ea typeface="Calibri" charset="0"/>
+                        <a:cs typeface="Calibri" charset="0"/>
+                      </a:endParaRPr>
+                    </a:p>
+                  </a:txBody>
+                  <a:tcPr marL="0" marR="76200" marT="88900" marB="88900">
+                    <a:lnL w="0" cap="flat" cmpd="sng" algn="ctr">
+                      <a:solidFill>
+                        <a:srgbClr val="666666"/>
+                      </a:solidFill>
+                      <a:prstDash val="solid"/>
+                      <a:round/>
+                      <a:headEnd type="none" w="med" len="med"/>
+                      <a:tailEnd type="none" w="med" len="med"/>
+                    </a:lnL>
+                    <a:lnR w="0" cap="flat" cmpd="sng" algn="ctr">
+                      <a:solidFill>
+                        <a:srgbClr val="666666"/>
+                      </a:solidFill>
+                      <a:prstDash val="solid"/>
+                      <a:round/>
+                      <a:headEnd type="none" w="med" len="med"/>
+                      <a:tailEnd type="none" w="med" len="med"/>
+                    </a:lnR>
+                    <a:lnT w="0" cap="flat" cmpd="sng" algn="ctr">
+                      <a:solidFill>
+                        <a:srgbClr val="666666"/>
+                      </a:solidFill>
+                      <a:prstDash val="solid"/>
+                      <a:round/>
+                      <a:headEnd type="none" w="med" len="med"/>
+                      <a:tailEnd type="none" w="med" len="med"/>
+                    </a:lnT>
+                    <a:lnB w="6350" cap="flat" cmpd="sng" algn="ctr">
+                      <a:solidFill>
+                        <a:srgbClr val="E6EEEF"/>
+                      </a:solidFill>
+                      <a:prstDash val="solid"/>
+                      <a:round/>
+                      <a:headEnd type="none" w="med" len="med"/>
+                      <a:tailEnd type="none" w="med" len="med"/>
+                    </a:lnB>
+                    <a:solidFill>
+                      <a:srgbClr val="F2F7F3"/>
+                    </a:solidFill>
+                  </a:tcPr>
+                </a:tc>
+                <a:tc>
+                  <a:txBody>
+                    <a:bodyPr/>
+                    <a:lstStyle/>
+                    <a:p>
+                      <a:pPr algn="r" indent="0" marL="0">
+                        <a:buNone/>
+                      </a:pPr>
+                      <a:r>
+                        <a:rPr lang="en-US" sz="1300" b="1" dirty="0">
+                          <a:solidFill>
+                            <a:srgbClr val="33474C"/>
+                          </a:solidFill>
+                          <a:latin typeface="Calibri" pitchFamily="34" charset="0"/>
+                          <a:ea typeface="Calibri" pitchFamily="34" charset="-122"/>
+                          <a:cs typeface="Calibri" pitchFamily="34" charset="-120"/>
+                        </a:rPr>
+                        <a:t>30.6%</a:t>
+                      </a:r>
+                      <a:endParaRPr lang="en-US" sz="1300" dirty="0">
+                        <a:latin typeface="Calibri" charset="0"/>
+                        <a:ea typeface="Calibri" charset="0"/>
+                        <a:cs typeface="Calibri" charset="0"/>
+                      </a:endParaRPr>
+                    </a:p>
+                  </a:txBody>
+                  <a:tcPr marL="0" marR="76200" marT="88900" marB="88900">
+                    <a:lnL w="0" cap="flat" cmpd="sng" algn="ctr">
+                      <a:solidFill>
+                        <a:srgbClr val="666666"/>
+                      </a:solidFill>
+                      <a:prstDash val="solid"/>
+                      <a:round/>
+                      <a:headEnd type="none" w="med" len="med"/>
+                      <a:tailEnd type="none" w="med" len="med"/>
+                    </a:lnL>
+                    <a:lnR w="0" cap="flat" cmpd="sng" algn="ctr">
+                      <a:solidFill>
+                        <a:srgbClr val="666666"/>
+                      </a:solidFill>
+                      <a:prstDash val="solid"/>
+                      <a:round/>
+                      <a:headEnd type="none" w="med" len="med"/>
+                      <a:tailEnd type="none" w="med" len="med"/>
+                    </a:lnR>
+                    <a:lnT w="0" cap="flat" cmpd="sng" algn="ctr">
+                      <a:solidFill>
+                        <a:srgbClr val="666666"/>
+                      </a:solidFill>
+                      <a:prstDash val="solid"/>
+                      <a:round/>
+                      <a:headEnd type="none" w="med" len="med"/>
+                      <a:tailEnd type="none" w="med" len="med"/>
+                    </a:lnT>
+                    <a:lnB w="6350" cap="flat" cmpd="sng" algn="ctr">
+                      <a:solidFill>
+                        <a:srgbClr val="E6EEEF"/>
+                      </a:solidFill>
+                      <a:prstDash val="solid"/>
+                      <a:round/>
+                      <a:headEnd type="none" w="med" len="med"/>
+                      <a:tailEnd type="none" w="med" len="med"/>
+                    </a:lnB>
+                    <a:solidFill>
+                      <a:srgbClr val="F2F7F3"/>
+                    </a:solidFill>
+                  </a:tcPr>
+                </a:tc>
+                <a:tc>
+                  <a:txBody>
+                    <a:bodyPr/>
+                    <a:lstStyle/>
+                    <a:p>
+                      <a:pPr algn="r" indent="0" marL="0">
+                        <a:buNone/>
+                      </a:pPr>
+                      <a:r>
+                        <a:rPr lang="en-US" sz="1300" b="1" dirty="0">
+                          <a:solidFill>
+                            <a:srgbClr val="33474C"/>
+                          </a:solidFill>
+                          <a:latin typeface="Calibri" pitchFamily="34" charset="0"/>
+                          <a:ea typeface="Calibri" pitchFamily="34" charset="-122"/>
+                          <a:cs typeface="Calibri" pitchFamily="34" charset="-120"/>
+                        </a:rPr>
+                        <a:t>inside 20–30%</a:t>
+                      </a:r>
+                      <a:endParaRPr lang="en-US" sz="1300" dirty="0">
+                        <a:latin typeface="Calibri" charset="0"/>
+                        <a:ea typeface="Calibri" charset="0"/>
+                        <a:cs typeface="Calibri" charset="0"/>
+                      </a:endParaRPr>
+                    </a:p>
+                  </a:txBody>
+                  <a:tcPr marL="0" marR="76200" marT="88900" marB="88900">
+                    <a:lnL w="0" cap="flat" cmpd="sng" algn="ctr">
+                      <a:solidFill>
+                        <a:srgbClr val="666666"/>
+                      </a:solidFill>
+                      <a:prstDash val="solid"/>
+                      <a:round/>
+                      <a:headEnd type="none" w="med" len="med"/>
+                      <a:tailEnd type="none" w="med" len="med"/>
+                    </a:lnL>
+                    <a:lnR w="0" cap="flat" cmpd="sng" algn="ctr">
+                      <a:solidFill>
+                        <a:srgbClr val="666666"/>
+                      </a:solidFill>
+                      <a:prstDash val="solid"/>
+                      <a:round/>
+                      <a:headEnd type="none" w="med" len="med"/>
+                      <a:tailEnd type="none" w="med" len="med"/>
+                    </a:lnR>
+                    <a:lnT w="0" cap="flat" cmpd="sng" algn="ctr">
+                      <a:solidFill>
+                        <a:srgbClr val="666666"/>
+                      </a:solidFill>
+                      <a:prstDash val="solid"/>
+                      <a:round/>
+                      <a:headEnd type="none" w="med" len="med"/>
+                      <a:tailEnd type="none" w="med" len="med"/>
+                    </a:lnT>
+                    <a:lnB w="6350" cap="flat" cmpd="sng" algn="ctr">
+                      <a:solidFill>
+                        <a:srgbClr val="E6EEEF"/>
+                      </a:solidFill>
+                      <a:prstDash val="solid"/>
+                      <a:round/>
+                      <a:headEnd type="none" w="med" len="med"/>
+                      <a:tailEnd type="none" w="med" len="med"/>
+                    </a:lnB>
+                    <a:solidFill>
+                      <a:srgbClr val="F2F7F3"/>
+                    </a:solidFill>
+                  </a:tcPr>
+                </a:tc>
+              </a:tr>
+            </a:tbl>
+          </a:graphicData>
+        </a:graphic>
+      </p:graphicFrame>
+      <p:sp>
+        <p:nvSpPr>
+          <p:cNvPr id="13" name="rule-val"/>
+          <p:cNvSpPr/>
+          <p:nvPr/>
+        </p:nvSpPr>
+        <p:spPr>
+          <a:xfrm>
+            <a:off x="685800" y="5230368"/>
+            <a:ext cx="10789920" cy="0"/>
+          </a:xfrm>
+          <a:prstGeom prst="line">
+            <a:avLst/>
+          </a:prstGeom>
+          <a:noFill/>
+          <a:ln w="12700">
+            <a:solidFill>
+              <a:srgbClr val="DCE7E9"/>
+            </a:solidFill>
+            <a:prstDash val="solid"/>
+          </a:ln>
+        </p:spPr>
+      </p:sp>
+      <p:sp>
+        <p:nvSpPr>
+          <p:cNvPr id="14" name="v-note"/>
+          <p:cNvSpPr txBox="1"/>
+          <p:nvPr/>
+        </p:nvSpPr>
+        <p:spPr>
+          <a:xfrm>
+            <a:off x="685800" y="5376672"/>
+            <a:ext cx="6858000" cy="566928"/>
+          </a:xfrm>
+          <a:prstGeom prst="rect">
+            <a:avLst/>
+          </a:prstGeom>
+          <a:noFill/>
+          <a:ln/>
+        </p:spPr>
+        <p:txBody>
+          <a:bodyPr wrap="square" lIns="0" tIns="0" rIns="0" bIns="0" rtlCol="0" anchor="t"/>
+          <a:lstStyle/>
+          <a:p>
+            <a:pPr indent="0" marL="0">
+              <a:buNone/>
+            </a:pPr>
+            <a:r>
+              <a:rPr lang="en-US" sz="1200" b="1" dirty="0">
+                <a:solidFill>
+                  <a:srgbClr val="0E2127"/>
+                </a:solidFill>
+              </a:rPr>
+              <a:t>Nothing is tuned to make this work. </a:t>
+            </a:r>
+            <a:pPr indent="0" marL="0">
+              <a:buNone/>
+            </a:pPr>
+            <a:r>
+              <a:rPr lang="en-US" sz="1200" dirty="0">
+                <a:solidFill>
+                  <a:srgbClr val="44555A"/>
+                </a:solidFill>
+              </a:rPr>
+              <a:t>The only inputs are conservation of salt mass and the 60,000 mg/L concentration ceiling. The published band is reproduced from floor to ceiling, and a test fails the build if it stops being.</a:t>
+            </a:r>
+            <a:endParaRPr lang="en-US" sz="1200" dirty="0"/>
+          </a:p>
+        </p:txBody>
+      </p:sp>
+      <p:sp>
+        <p:nvSpPr>
+          <p:cNvPr id="15" name="stat-value-v-s1"/>
+          <p:cNvSpPr txBox="1"/>
+          <p:nvPr/>
+        </p:nvSpPr>
+        <p:spPr>
+          <a:xfrm>
+            <a:off x="8001000" y="4992624"/>
+            <a:ext cx="1737360" cy="713232"/>
+          </a:xfrm>
+          <a:prstGeom prst="rect">
+            <a:avLst/>
+          </a:prstGeom>
+          <a:noFill/>
+          <a:ln/>
+        </p:spPr>
+        <p:txBody>
+          <a:bodyPr wrap="square" lIns="0" tIns="0" rIns="0" bIns="0" rtlCol="0" anchor="b"/>
+          <a:lstStyle/>
+          <a:p>
+            <a:pPr algn="l" indent="0" marL="0">
+              <a:buNone/>
+            </a:pPr>
+            <a:r>
+              <a:rPr lang="en-US" sz="2900" b="1" dirty="0">
+                <a:solidFill>
+                  <a:schemeClr val="accent1"/>
+                </a:solidFill>
+                <a:latin typeface="Cambria" pitchFamily="34" charset="0"/>
+                <a:ea typeface="Cambria" pitchFamily="34" charset="-122"/>
+                <a:cs typeface="Cambria" pitchFamily="34" charset="-120"/>
+              </a:rPr>
+              <a:t>21/25</a:t>
+            </a:r>
+            <a:endParaRPr lang="en-US" sz="2900" dirty="0"/>
+          </a:p>
+        </p:txBody>
+      </p:sp>
+      <p:sp>
+        <p:nvSpPr>
+          <p:cNvPr id="16" name="stat-label-v-s1"/>
+          <p:cNvSpPr txBox="1"/>
+          <p:nvPr/>
+        </p:nvSpPr>
+        <p:spPr>
+          <a:xfrm>
+            <a:off x="8001000" y="5724144"/>
+            <a:ext cx="1737360" cy="274320"/>
+          </a:xfrm>
+          <a:prstGeom prst="rect">
+            <a:avLst/>
+          </a:prstGeom>
+          <a:noFill/>
+          <a:ln/>
+        </p:spPr>
+        <p:txBody>
+          <a:bodyPr wrap="square" lIns="0" tIns="0" rIns="0" bIns="0" rtlCol="0" anchor="ctr"/>
+          <a:lstStyle/>
+          <a:p>
+            <a:pPr indent="0" marL="0">
+              <a:buNone/>
+            </a:pPr>
+            <a:r>
+              <a:rPr lang="en-US" sz="1000" b="1" spc="140" kern="0" dirty="0">
+                <a:solidFill>
+                  <a:srgbClr val="6B8086"/>
+                </a:solidFill>
+              </a:rPr>
+              <a:t>COEFFICIENTS SOURCED</a:t>
+            </a:r>
+            <a:endParaRPr lang="en-US" sz="1000" dirty="0"/>
+          </a:p>
+        </p:txBody>
+      </p:sp>
+      <p:sp>
+        <p:nvSpPr>
+          <p:cNvPr id="17" name="stat-note-v-s1"/>
+          <p:cNvSpPr txBox="1"/>
+          <p:nvPr/>
+        </p:nvSpPr>
+        <p:spPr>
+          <a:xfrm>
+            <a:off x="8001000" y="5998464"/>
+            <a:ext cx="1737360" cy="566928"/>
+          </a:xfrm>
+          <a:prstGeom prst="rect">
+            <a:avLst/>
+          </a:prstGeom>
+          <a:noFill/>
+          <a:ln/>
+        </p:spPr>
+        <p:txBody>
+          <a:bodyPr wrap="square" lIns="0" tIns="0" rIns="0" bIns="0" rtlCol="0" anchor="t"/>
+          <a:lstStyle/>
+          <a:p>
+            <a:pPr indent="0" marL="0">
+              <a:buNone/>
+            </a:pPr>
+            <a:r>
+              <a:rPr lang="en-US" sz="1100" dirty="0">
+                <a:solidFill>
+                  <a:srgbClr val="55676C"/>
+                </a:solidFill>
+              </a:rPr>
+              <a:t>CPCB, CEA, TNERC,</a:t>
+            </a:r>
+            <a:endParaRPr lang="en-US" sz="1100" dirty="0"/>
+          </a:p>
+          <a:p>
+            <a:pPr indent="0" marL="0">
+              <a:buNone/>
+            </a:pPr>
+            <a:r>
+              <a:rPr lang="en-US" sz="1100" dirty="0">
+                <a:solidFill>
+                  <a:srgbClr val="55676C"/>
+                </a:solidFill>
+              </a:rPr>
+              <a:t>pollution board, EU BAT</a:t>
+            </a:r>
+            <a:endParaRPr lang="en-US" sz="1100" dirty="0"/>
+          </a:p>
+        </p:txBody>
+      </p:sp>
+      <p:sp>
+        <p:nvSpPr>
+          <p:cNvPr id="18" name="stat-value-v-s2"/>
+          <p:cNvSpPr txBox="1"/>
+          <p:nvPr/>
+        </p:nvSpPr>
+        <p:spPr>
+          <a:xfrm>
+            <a:off x="9784080" y="4992624"/>
+            <a:ext cx="1737360" cy="713232"/>
+          </a:xfrm>
+          <a:prstGeom prst="rect">
+            <a:avLst/>
+          </a:prstGeom>
+          <a:noFill/>
+          <a:ln/>
+        </p:spPr>
+        <p:txBody>
+          <a:bodyPr wrap="square" lIns="0" tIns="0" rIns="0" bIns="0" rtlCol="0" anchor="b"/>
+          <a:lstStyle/>
+          <a:p>
+            <a:pPr algn="l" indent="0" marL="0">
+              <a:buNone/>
+            </a:pPr>
+            <a:r>
+              <a:rPr lang="en-US" sz="2900" b="1" dirty="0">
+                <a:solidFill>
+                  <a:srgbClr val="B98A2E"/>
+                </a:solidFill>
+                <a:latin typeface="Cambria" pitchFamily="34" charset="0"/>
+                <a:ea typeface="Cambria" pitchFamily="34" charset="-122"/>
+                <a:cs typeface="Cambria" pitchFamily="34" charset="-120"/>
+              </a:rPr>
+              <a:t>0</a:t>
+            </a:r>
+            <a:endParaRPr lang="en-US" sz="2900" dirty="0"/>
+          </a:p>
+        </p:txBody>
+      </p:sp>
+      <p:sp>
+        <p:nvSpPr>
+          <p:cNvPr id="19" name="stat-label-v-s2"/>
+          <p:cNvSpPr txBox="1"/>
+          <p:nvPr/>
+        </p:nvSpPr>
+        <p:spPr>
+          <a:xfrm>
+            <a:off x="9784080" y="5724144"/>
+            <a:ext cx="1737360" cy="274320"/>
+          </a:xfrm>
+          <a:prstGeom prst="rect">
+            <a:avLst/>
+          </a:prstGeom>
+          <a:noFill/>
+          <a:ln/>
+        </p:spPr>
+        <p:txBody>
+          <a:bodyPr wrap="square" lIns="0" tIns="0" rIns="0" bIns="0" rtlCol="0" anchor="ctr"/>
+          <a:lstStyle/>
+          <a:p>
+            <a:pPr indent="0" marL="0">
+              <a:buNone/>
+            </a:pPr>
+            <a:r>
+              <a:rPr lang="en-US" sz="1000" b="1" spc="140" kern="0" dirty="0">
+                <a:solidFill>
+                  <a:srgbClr val="6B8086"/>
+                </a:solidFill>
+              </a:rPr>
+              <a:t>MEASURED</a:t>
+            </a:r>
+            <a:endParaRPr lang="en-US" sz="1000" dirty="0"/>
+          </a:p>
+        </p:txBody>
+      </p:sp>
+      <p:sp>
+        <p:nvSpPr>
+          <p:cNvPr id="20" name="stat-note-v-s2"/>
+          <p:cNvSpPr txBox="1"/>
+          <p:nvPr/>
+        </p:nvSpPr>
+        <p:spPr>
+          <a:xfrm>
+            <a:off x="9784080" y="5998464"/>
+            <a:ext cx="1737360" cy="566928"/>
+          </a:xfrm>
+          <a:prstGeom prst="rect">
+            <a:avLst/>
+          </a:prstGeom>
+          <a:noFill/>
+          <a:ln/>
+        </p:spPr>
+        <p:txBody>
+          <a:bodyPr wrap="square" lIns="0" tIns="0" rIns="0" bIns="0" rtlCol="0" anchor="t"/>
+          <a:lstStyle/>
+          <a:p>
+            <a:pPr indent="0" marL="0">
+              <a:buNone/>
+            </a:pPr>
+            <a:r>
+              <a:rPr lang="en-US" sz="1100" dirty="0">
+                <a:solidFill>
+                  <a:srgbClr val="55676C"/>
+                </a:solidFill>
+              </a:rPr>
+              <a:t>and we will not pretend</a:t>
+            </a:r>
+            <a:endParaRPr lang="en-US" sz="1100" dirty="0"/>
+          </a:p>
+          <a:p>
+            <a:pPr indent="0" marL="0">
+              <a:buNone/>
+            </a:pPr>
+            <a:r>
+              <a:rPr lang="en-US" sz="1100" dirty="0">
+                <a:solidFill>
+                  <a:srgbClr val="55676C"/>
+                </a:solidFill>
+              </a:rPr>
+              <a:t>otherwise to win a prize</a:t>
+            </a:r>
+            <a:endParaRPr lang="en-US" sz="1100" dirty="0"/>
+          </a:p>
+        </p:txBody>
+      </p:sp>
+      <p:sp>
+        <p:nvSpPr>
+          <p:cNvPr id="21" name="v-foot"/>
+          <p:cNvSpPr txBox="1"/>
+          <p:nvPr/>
+        </p:nvSpPr>
+        <p:spPr>
+          <a:xfrm>
+            <a:off x="685800" y="6035040"/>
+            <a:ext cx="6858000" cy="274320"/>
+          </a:xfrm>
+          <a:prstGeom prst="rect">
+            <a:avLst/>
+          </a:prstGeom>
+          <a:noFill/>
+          <a:ln/>
+        </p:spPr>
+        <p:txBody>
+          <a:bodyPr wrap="square" lIns="0" tIns="0" rIns="0" bIns="0" rtlCol="0" anchor="ctr"/>
+          <a:lstStyle/>
+          <a:p>
+            <a:pPr indent="0" marL="0">
+              <a:buNone/>
+            </a:pPr>
+            <a:r>
+              <a:rPr lang="en-US" sz="1100" i="1" dirty="0">
+                <a:solidFill>
+                  <a:srgbClr val="7B8E93"/>
+                </a:solidFill>
+              </a:rPr>
+              <a:t>This is cross-validation against published operating data. It is not measurement, and we never call it that.</a:t>
+            </a:r>
+            <a:endParaRPr lang="en-US" sz="1100" dirty="0"/>
+          </a:p>
+        </p:txBody>
+      </p:sp>
+      <p:sp>
+        <p:nvSpPr>
+          <p:cNvPr id="23" name="Text 1"/>
+          <p:cNvSpPr/>
+          <p:nvPr>
+            <p:ph idx="104" type="chart" hasCustomPrompt="1"/>
+          </p:nvPr>
+        </p:nvSpPr>
+        <p:spPr>
+          <a:xfrm>
+            <a:off x="685800" y="2240280"/>
+            <a:ext cx="10789920" cy="3931920"/>
+          </a:xfrm>
+          <a:prstGeom prst="rect">
+            <a:avLst/>
+          </a:prstGeom>
+          <a:noFill/>
+          <a:ln/>
+        </p:spPr>
+        <p:txBody>
+          <a:bodyPr wrap="square" rtlCol="0"/>
+          <a:lstStyle/>
+          <a:p>
+            <a:pPr indent="0" marL="0">
+              <a:buNone/>
+            </a:pPr>
+            <a:endParaRPr lang="en-US" dirty="0"/>
           </a:p>
         </p:txBody>
       </p:sp>
@@ -11437,7 +12886,7 @@
             <a:lvl1pPr>
               <a:defRPr sz="900">
                 <a:solidFill>
-                  <a:srgbClr val="6E858B"/>
+                  <a:srgbClr val="9AAAAE"/>
                 </a:solidFill>
               </a:defRPr>
             </a:lvl1pPr>
@@ -11447,6 +12896,616 @@
             <a:fld id="{F7021451-1387-4CA6-816F-3879F97B5CBC}" type="slidenum">
               <a:rPr b="0" lang="en-US"/>
               <a:t>14</a:t>
+            </a:fld>
+            <a:endParaRPr lang="en-US"/>
+          </a:p>
+        </p:txBody>
+      </p:sp>
+    </p:spTree>
+  </p:cSld>
+  <p:clrMapOvr>
+    <a:masterClrMapping/>
+  </p:clrMapOvr>
+</p:sld>
+</file>
+
+<file path=ppt/slides/slide15.xml><?xml version="1.0" encoding="utf-8"?>
+<p:sld xmlns:a="http://schemas.openxmlformats.org/drawingml/2006/main" xmlns:r="http://schemas.openxmlformats.org/officeDocument/2006/relationships" xmlns:p="http://schemas.openxmlformats.org/presentationml/2006/main">
+  <p:cSld name="Slide 15">
+    <p:spTree>
+      <p:nvGrpSpPr>
+        <p:cNvPr id="1" name=""/>
+        <p:cNvGrpSpPr/>
+        <p:nvPr/>
+      </p:nvGrpSpPr>
+      <p:grpSpPr>
+        <a:xfrm>
+          <a:off x="0" y="0"/>
+          <a:ext cx="0" cy="0"/>
+          <a:chOff x="0" y="0"/>
+          <a:chExt cx="0" cy="0"/>
+        </a:xfrm>
+      </p:grpSpPr>
+      <p:sp>
+        <p:nvSpPr>
+          <p:cNvPr id="2" name="Text 0"/>
+          <p:cNvSpPr/>
+          <p:nvPr>
+            <p:ph idx="100" type="body" hasCustomPrompt="1"/>
+          </p:nvPr>
+        </p:nvSpPr>
+        <p:spPr>
+          <a:xfrm>
+            <a:off x="685800" y="384048"/>
+            <a:ext cx="10789920" cy="274320"/>
+          </a:xfrm>
+          <a:prstGeom prst="rect">
+            <a:avLst/>
+          </a:prstGeom>
+          <a:noFill/>
+          <a:ln/>
+        </p:spPr>
+        <p:txBody>
+          <a:bodyPr wrap="square" rtlCol="0"/>
+          <a:lstStyle/>
+          <a:p>
+            <a:pPr indent="0" marL="0">
+              <a:buNone/>
+            </a:pPr>
+            <a:r>
+              <a:rPr lang="en-US" sz="1100" b="1" spc="200" kern="0" dirty="0">
+                <a:solidFill>
+                  <a:srgbClr val="B98A2E"/>
+                </a:solidFill>
+              </a:rPr>
+              <a:t>THE TEAM</a:t>
+            </a:r>
+            <a:endParaRPr lang="en-US" sz="1100" dirty="0"/>
+          </a:p>
+        </p:txBody>
+      </p:sp>
+      <p:sp>
+        <p:nvSpPr>
+          <p:cNvPr id="3" name="Text 0"/>
+          <p:cNvSpPr/>
+          <p:nvPr>
+            <p:ph idx="101" type="title" hasCustomPrompt="1"/>
+          </p:nvPr>
+        </p:nvSpPr>
+        <p:spPr>
+          <a:xfrm>
+            <a:off x="685800" y="658368"/>
+            <a:ext cx="10789920" cy="932688"/>
+          </a:xfrm>
+          <a:prstGeom prst="rect">
+            <a:avLst/>
+          </a:prstGeom>
+          <a:noFill/>
+          <a:ln/>
+        </p:spPr>
+        <p:txBody>
+          <a:bodyPr wrap="square" rtlCol="0" anchor="t"/>
+          <a:lstStyle/>
+          <a:p>
+            <a:pPr algn="l" indent="0" marL="0">
+              <a:buNone/>
+            </a:pPr>
+            <a:r>
+              <a:rPr lang="en-US" sz="3100" b="1" dirty="0">
+                <a:solidFill>
+                  <a:srgbClr val="FFFFFF"/>
+                </a:solidFill>
+              </a:rPr>
+              <a:t>Built, tested and adversarially reviewed</a:t>
+            </a:r>
+            <a:endParaRPr lang="en-US" sz="3100" dirty="0"/>
+          </a:p>
+        </p:txBody>
+      </p:sp>
+      <p:sp>
+        <p:nvSpPr>
+          <p:cNvPr id="4" name="tm-0"/>
+          <p:cNvSpPr txBox="1"/>
+          <p:nvPr/>
+        </p:nvSpPr>
+        <p:spPr>
+          <a:xfrm>
+            <a:off x="685800" y="1965960"/>
+            <a:ext cx="5120640" cy="384048"/>
+          </a:xfrm>
+          <a:prstGeom prst="rect">
+            <a:avLst/>
+          </a:prstGeom>
+          <a:noFill/>
+          <a:ln/>
+        </p:spPr>
+        <p:txBody>
+          <a:bodyPr wrap="square" lIns="0" tIns="0" rIns="0" bIns="0" rtlCol="0" anchor="ctr"/>
+          <a:lstStyle/>
+          <a:p>
+            <a:pPr indent="0" marL="0">
+              <a:buNone/>
+            </a:pPr>
+            <a:r>
+              <a:rPr lang="en-US" sz="1900" b="1" dirty="0">
+                <a:solidFill>
+                  <a:srgbClr val="FFFFFF"/>
+                </a:solidFill>
+                <a:latin typeface="Cambria" pitchFamily="34" charset="0"/>
+                <a:ea typeface="Cambria" pitchFamily="34" charset="-122"/>
+                <a:cs typeface="Cambria" pitchFamily="34" charset="-120"/>
+              </a:rPr>
+              <a:t>Shorya Mittal</a:t>
+            </a:r>
+            <a:endParaRPr lang="en-US" sz="1900" dirty="0"/>
+          </a:p>
+        </p:txBody>
+      </p:sp>
+      <p:sp>
+        <p:nvSpPr>
+          <p:cNvPr id="5" name="tr-0"/>
+          <p:cNvSpPr txBox="1"/>
+          <p:nvPr/>
+        </p:nvSpPr>
+        <p:spPr>
+          <a:xfrm>
+            <a:off x="685800" y="2377440"/>
+            <a:ext cx="5120640" cy="274320"/>
+          </a:xfrm>
+          <a:prstGeom prst="rect">
+            <a:avLst/>
+          </a:prstGeom>
+          <a:noFill/>
+          <a:ln/>
+        </p:spPr>
+        <p:txBody>
+          <a:bodyPr wrap="square" lIns="0" tIns="0" rIns="0" bIns="0" rtlCol="0" anchor="ctr"/>
+          <a:lstStyle/>
+          <a:p>
+            <a:pPr indent="0" marL="0">
+              <a:buNone/>
+            </a:pPr>
+            <a:r>
+              <a:rPr lang="en-US" sz="1000" b="1" spc="140" kern="0" dirty="0">
+                <a:solidFill>
+                  <a:srgbClr val="B98A2E"/>
+                </a:solidFill>
+              </a:rPr>
+              <a:t>TEAM LEADER</a:t>
+            </a:r>
+            <a:endParaRPr lang="en-US" sz="1000" dirty="0"/>
+          </a:p>
+        </p:txBody>
+      </p:sp>
+      <p:sp>
+        <p:nvSpPr>
+          <p:cNvPr id="6" name="td-0"/>
+          <p:cNvSpPr txBox="1"/>
+          <p:nvPr/>
+        </p:nvSpPr>
+        <p:spPr>
+          <a:xfrm>
+            <a:off x="685800" y="2688336"/>
+            <a:ext cx="5120640" cy="640080"/>
+          </a:xfrm>
+          <a:prstGeom prst="rect">
+            <a:avLst/>
+          </a:prstGeom>
+          <a:noFill/>
+          <a:ln/>
+        </p:spPr>
+        <p:txBody>
+          <a:bodyPr wrap="square" lIns="0" tIns="0" rIns="0" bIns="0" rtlCol="0" anchor="t"/>
+          <a:lstStyle/>
+          <a:p>
+            <a:pPr indent="0" marL="0">
+              <a:buNone/>
+            </a:pPr>
+            <a:r>
+              <a:rPr lang="en-US" sz="1200" dirty="0">
+                <a:solidFill>
+                  <a:srgbClr val="B7CBD0"/>
+                </a:solidFill>
+              </a:rPr>
+              <a:t>Engine, water accounting and interface</a:t>
+            </a:r>
+            <a:endParaRPr lang="en-US" sz="1200" dirty="0"/>
+          </a:p>
+        </p:txBody>
+      </p:sp>
+      <p:sp>
+        <p:nvSpPr>
+          <p:cNvPr id="7" name="rule12"/>
+          <p:cNvSpPr/>
+          <p:nvPr/>
+        </p:nvSpPr>
+        <p:spPr>
+          <a:xfrm>
+            <a:off x="685800" y="3438144"/>
+            <a:ext cx="10789920" cy="0"/>
+          </a:xfrm>
+          <a:prstGeom prst="line">
+            <a:avLst/>
+          </a:prstGeom>
+          <a:noFill/>
+          <a:ln w="12700">
+            <a:solidFill>
+              <a:srgbClr val="2A5460"/>
+            </a:solidFill>
+            <a:prstDash val="solid"/>
+          </a:ln>
+        </p:spPr>
+      </p:sp>
+      <p:sp>
+        <p:nvSpPr>
+          <p:cNvPr id="8" name="built-h"/>
+          <p:cNvSpPr txBox="1"/>
+          <p:nvPr/>
+        </p:nvSpPr>
+        <p:spPr>
+          <a:xfrm>
+            <a:off x="685800" y="3621024"/>
+            <a:ext cx="5120640" cy="310896"/>
+          </a:xfrm>
+          <a:prstGeom prst="rect">
+            <a:avLst/>
+          </a:prstGeom>
+          <a:noFill/>
+          <a:ln/>
+        </p:spPr>
+        <p:txBody>
+          <a:bodyPr wrap="square" lIns="0" tIns="0" rIns="0" bIns="0" rtlCol="0" anchor="ctr"/>
+          <a:lstStyle/>
+          <a:p>
+            <a:pPr indent="0" marL="0">
+              <a:buNone/>
+            </a:pPr>
+            <a:r>
+              <a:rPr lang="en-US" sz="1400" b="1" dirty="0">
+                <a:solidFill>
+                  <a:srgbClr val="FFFFFF"/>
+                </a:solidFill>
+                <a:latin typeface="Cambria" pitchFamily="34" charset="0"/>
+                <a:ea typeface="Cambria" pitchFamily="34" charset="-122"/>
+                <a:cs typeface="Cambria" pitchFamily="34" charset="-120"/>
+              </a:rPr>
+              <a:t>What exists today</a:t>
+            </a:r>
+            <a:endParaRPr lang="en-US" sz="1400" dirty="0"/>
+          </a:p>
+        </p:txBody>
+      </p:sp>
+      <p:sp>
+        <p:nvSpPr>
+          <p:cNvPr id="9" name="built-b"/>
+          <p:cNvSpPr txBox="1"/>
+          <p:nvPr/>
+        </p:nvSpPr>
+        <p:spPr>
+          <a:xfrm>
+            <a:off x="685800" y="3968496"/>
+            <a:ext cx="5120640" cy="1600200"/>
+          </a:xfrm>
+          <a:prstGeom prst="rect">
+            <a:avLst/>
+          </a:prstGeom>
+          <a:noFill/>
+          <a:ln/>
+        </p:spPr>
+        <p:txBody>
+          <a:bodyPr wrap="square" lIns="0" tIns="0" rIns="0" bIns="0" rtlCol="0" anchor="t"/>
+          <a:lstStyle/>
+          <a:p>
+            <a:pPr indent="0" marL="0">
+              <a:buNone/>
+            </a:pPr>
+            <a:r>
+              <a:rPr lang="en-US" sz="1250" dirty="0">
+                <a:solidFill>
+                  <a:srgbClr val="B7CBD0"/>
+                </a:solidFill>
+              </a:rPr>
+              <a:t>A working engine and interface, dependency-free. </a:t>
+            </a:r>
+            <a:pPr indent="0" marL="0">
+              <a:buNone/>
+            </a:pPr>
+            <a:r>
+              <a:rPr lang="en-US" sz="1250" b="1" dirty="0">
+                <a:solidFill>
+                  <a:srgbClr val="4ECF9E"/>
+                </a:solidFill>
+              </a:rPr>
+              <a:t>95 engine tests</a:t>
+            </a:r>
+            <a:pPr indent="0" marL="0">
+              <a:buNone/>
+            </a:pPr>
+            <a:r>
+              <a:rPr lang="en-US" sz="1250" dirty="0">
+                <a:solidFill>
+                  <a:srgbClr val="B7CBD0"/>
+                </a:solidFill>
+              </a:rPr>
+              <a:t>, a golden-path suite, safety-interlock tests across five fault modes, a ten-run determinism check, and a tamper test that breaks the ledger chain on purpose to prove it detects it.
+</a:t>
+            </a:r>
+            <a:pPr indent="0" marL="0">
+              <a:buNone/>
+            </a:pPr>
+            <a:r>
+              <a:rPr lang="en-US" sz="1250" b="1" dirty="0">
+                <a:solidFill>
+                  <a:srgbClr val="B7CBD0"/>
+                </a:solidFill>
+              </a:rPr>
+              <a:t>Evidence discipline: </a:t>
+            </a:r>
+            <a:pPr indent="0" marL="0">
+              <a:buNone/>
+            </a:pPr>
+            <a:r>
+              <a:rPr lang="en-US" sz="1250" dirty="0">
+                <a:solidFill>
+                  <a:srgbClr val="B7CBD0"/>
+                </a:solidFill>
+              </a:rPr>
+              <a:t>17 published, 4 derived, 4 assumed and </a:t>
+            </a:r>
+            <a:pPr indent="0" marL="0">
+              <a:buNone/>
+            </a:pPr>
+            <a:r>
+              <a:rPr lang="en-US" sz="1250" b="1" dirty="0">
+                <a:solidFill>
+                  <a:srgbClr val="E0B45A"/>
+                </a:solidFill>
+              </a:rPr>
+              <a:t>zero measured</a:t>
+            </a:r>
+            <a:pPr indent="0" marL="0">
+              <a:buNone/>
+            </a:pPr>
+            <a:r>
+              <a:rPr lang="en-US" sz="1250" dirty="0">
+                <a:solidFill>
+                  <a:srgbClr val="B7CBD0"/>
+                </a:solidFill>
+              </a:rPr>
+              <a:t> coefficients — enforced by a test.</a:t>
+            </a:r>
+            <a:endParaRPr lang="en-US" sz="1250" dirty="0"/>
+          </a:p>
+        </p:txBody>
+      </p:sp>
+      <p:sp>
+        <p:nvSpPr>
+          <p:cNvPr id="10" name="weak-h"/>
+          <p:cNvSpPr txBox="1"/>
+          <p:nvPr/>
+        </p:nvSpPr>
+        <p:spPr>
+          <a:xfrm>
+            <a:off x="6355080" y="3621024"/>
+            <a:ext cx="5120640" cy="310896"/>
+          </a:xfrm>
+          <a:prstGeom prst="rect">
+            <a:avLst/>
+          </a:prstGeom>
+          <a:noFill/>
+          <a:ln/>
+        </p:spPr>
+        <p:txBody>
+          <a:bodyPr wrap="square" lIns="0" tIns="0" rIns="0" bIns="0" rtlCol="0" anchor="ctr"/>
+          <a:lstStyle/>
+          <a:p>
+            <a:pPr indent="0" marL="0">
+              <a:buNone/>
+            </a:pPr>
+            <a:r>
+              <a:rPr lang="en-US" sz="1400" b="1" dirty="0">
+                <a:solidFill>
+                  <a:srgbClr val="E0B45A"/>
+                </a:solidFill>
+                <a:latin typeface="Cambria" pitchFamily="34" charset="0"/>
+                <a:ea typeface="Cambria" pitchFamily="34" charset="-122"/>
+                <a:cs typeface="Cambria" pitchFamily="34" charset="-120"/>
+              </a:rPr>
+              <a:t>Our biggest weakness, stated first</a:t>
+            </a:r>
+            <a:endParaRPr lang="en-US" sz="1400" dirty="0"/>
+          </a:p>
+        </p:txBody>
+      </p:sp>
+      <p:sp>
+        <p:nvSpPr>
+          <p:cNvPr id="11" name="weak-b"/>
+          <p:cNvSpPr txBox="1"/>
+          <p:nvPr/>
+        </p:nvSpPr>
+        <p:spPr>
+          <a:xfrm>
+            <a:off x="6355080" y="3968496"/>
+            <a:ext cx="5120640" cy="1463040"/>
+          </a:xfrm>
+          <a:prstGeom prst="rect">
+            <a:avLst/>
+          </a:prstGeom>
+          <a:noFill/>
+          <a:ln/>
+        </p:spPr>
+        <p:txBody>
+          <a:bodyPr wrap="square" lIns="0" tIns="0" rIns="0" bIns="0" rtlCol="0" anchor="t"/>
+          <a:lstStyle/>
+          <a:p>
+            <a:pPr indent="0" marL="0">
+              <a:buNone/>
+            </a:pPr>
+            <a:r>
+              <a:rPr lang="en-US" sz="1250" dirty="0">
+                <a:solidFill>
+                  <a:srgbClr val="B7CBD0"/>
+                </a:solidFill>
+              </a:rPr>
+              <a:t>We have not yet spoken to a dyehouse. Everything is modelled from public information, the basin weighting is a disclosed placeholder, and the optimiser handles one machine rather than a mill. Phase 1 of the pilot exists to replace our assumptions with their measurements — and some of our conclusions will change when it does.</a:t>
+            </a:r>
+            <a:endParaRPr lang="en-US" sz="1250" dirty="0"/>
+          </a:p>
+        </p:txBody>
+      </p:sp>
+      <p:sp>
+        <p:nvSpPr>
+          <p:cNvPr id="12" name="ask"/>
+          <p:cNvSpPr txBox="1"/>
+          <p:nvPr/>
+        </p:nvSpPr>
+        <p:spPr>
+          <a:xfrm>
+            <a:off x="685800" y="5559552"/>
+            <a:ext cx="10789920" cy="457200"/>
+          </a:xfrm>
+          <a:prstGeom prst="rect">
+            <a:avLst/>
+          </a:prstGeom>
+          <a:noFill/>
+          <a:ln/>
+        </p:spPr>
+        <p:txBody>
+          <a:bodyPr wrap="square" lIns="0" tIns="0" rIns="0" bIns="0" rtlCol="0" anchor="t"/>
+          <a:lstStyle/>
+          <a:p>
+            <a:pPr indent="0" marL="0">
+              <a:buNone/>
+            </a:pPr>
+            <a:r>
+              <a:rPr lang="en-US" sz="1200" b="1" dirty="0">
+                <a:solidFill>
+                  <a:srgbClr val="E0B45A"/>
+                </a:solidFill>
+              </a:rPr>
+              <a:t>What we are asking for:  </a:t>
+            </a:r>
+            <a:pPr indent="0" marL="0">
+              <a:buNone/>
+            </a:pPr>
+            <a:r>
+              <a:rPr lang="en-US" sz="1200" dirty="0">
+                <a:solidFill>
+                  <a:srgbClr val="B7CBD0"/>
+                </a:solidFill>
+              </a:rPr>
+              <a:t>one Tirupur dyeing unit or CETP willing to share two measured numbers: steam cost per cubic metre of reject, and the reject TDS ceiling. Our own sensitivity sweep says those two decide the answer, and they are the first thing Phase 1 measures.</a:t>
+            </a:r>
+            <a:endParaRPr lang="en-US" sz="1200" dirty="0"/>
+          </a:p>
+        </p:txBody>
+      </p:sp>
+      <p:sp>
+        <p:nvSpPr>
+          <p:cNvPr id="13" name="hook"/>
+          <p:cNvSpPr txBox="1"/>
+          <p:nvPr/>
+        </p:nvSpPr>
+        <p:spPr>
+          <a:xfrm>
+            <a:off x="685800" y="6053328"/>
+            <a:ext cx="10789920" cy="475488"/>
+          </a:xfrm>
+          <a:prstGeom prst="rect">
+            <a:avLst/>
+          </a:prstGeom>
+          <a:noFill/>
+          <a:ln/>
+        </p:spPr>
+        <p:txBody>
+          <a:bodyPr wrap="square" lIns="0" tIns="0" rIns="0" bIns="0" rtlCol="0" anchor="t"/>
+          <a:lstStyle/>
+          <a:p>
+            <a:pPr indent="0" marL="0">
+              <a:buNone/>
+            </a:pPr>
+            <a:r>
+              <a:rPr lang="en-US" sz="1500" b="1" i="1" dirty="0">
+                <a:solidFill>
+                  <a:srgbClr val="FFFFFF"/>
+                </a:solidFill>
+              </a:rPr>
+              <a:t>Zero Liquid Discharge gave India back its water. Nobody costed the coal it takes to keep it — and that cost is decided by a scheduling choice nobody connects to it.</a:t>
+            </a:r>
+            <a:endParaRPr lang="en-US" sz="1500" dirty="0"/>
+          </a:p>
+        </p:txBody>
+      </p:sp>
+      <p:sp>
+        <p:nvSpPr>
+          <p:cNvPr id="15" name="Text 0"/>
+          <p:cNvSpPr/>
+          <p:nvPr>
+            <p:ph idx="102" type="body" hasCustomPrompt="1"/>
+          </p:nvPr>
+        </p:nvSpPr>
+        <p:spPr>
+          <a:xfrm>
+            <a:off x="685800" y="1664208"/>
+            <a:ext cx="10332720" cy="548640"/>
+          </a:xfrm>
+          <a:prstGeom prst="rect">
+            <a:avLst/>
+          </a:prstGeom>
+          <a:noFill/>
+          <a:ln/>
+        </p:spPr>
+        <p:txBody>
+          <a:bodyPr wrap="square" rtlCol="0" anchor="t"/>
+          <a:lstStyle/>
+          <a:p>
+            <a:pPr algn="l" indent="0" marL="0">
+              <a:buNone/>
+            </a:pPr>
+            <a:endParaRPr lang="en-US" sz="1450" dirty="0"/>
+          </a:p>
+        </p:txBody>
+      </p:sp>
+      <p:sp>
+        <p:nvSpPr>
+          <p:cNvPr id="25" name="Slide Number Placeholder 0"/>
+          <p:cNvSpPr>
+            <a:spLocks noGrp="1"/>
+          </p:cNvSpPr>
+          <p:nvPr>
+            <p:ph type="sldNum" sz="quarter" idx="4294967295"/>
+          </p:nvPr>
+        </p:nvSpPr>
+        <p:spPr>
+          <a:xfrm>
+            <a:off x="11475720" y="6446520"/>
+            <a:ext cx="800000" cy="300000"/>
+          </a:xfrm>
+          <a:prstGeom prst="rect">
+            <a:avLst/>
+          </a:prstGeom>
+          <a:extLst>
+            <a:ext uri="{C572A759-6A51-4108-AA02-DFA0A04FC94B}">
+              <ma14:wrappingTextBoxFlag xmlns:ma14="http://schemas.microsoft.com/office/mac/drawingml/2011/main" val="0"/>
+            </a:ext>
+          </a:extLst>
+        </p:spPr>
+        <p:txBody>
+          <a:bodyPr/>
+          <a:lstStyle>
+            <a:lvl1pPr>
+              <a:defRPr sz="900">
+                <a:solidFill>
+                  <a:srgbClr val="6E858B"/>
+                </a:solidFill>
+              </a:defRPr>
+            </a:lvl1pPr>
+          </a:lstStyle>
+          <a:p>
+            <a:pPr algn="l"/>
+            <a:fld id="{F7021451-1387-4CA6-816F-3879F97B5CBC}" type="slidenum">
+              <a:rPr b="0" lang="en-US"/>
+              <a:t>15</a:t>
             </a:fld>
             <a:endParaRPr lang="en-US"/>
           </a:p>
@@ -11723,7 +13782,7 @@
                   <a:srgbClr val="44555A"/>
                 </a:solidFill>
               </a:rPr>
-              <a:t>Zero Liquid Discharge recycles the cluster’s water and raised unit operating costs 25 to 30 percent. Recycled water runs ₹120 to 150 per kilolitre against ₹30 to 60 for fresh.</a:t>
+              <a:t>ZLD recycles the cluster’s water and raised operating costs 25 to 30 percent. Pollution-board data puts the charge at ₹150–220 per kilolitre against ₹45 for river water — and ₹375–450 at under-used plants.</a:t>
             </a:r>
             <a:endParaRPr lang="en-US" sz="1050" dirty="0"/>
           </a:p>
@@ -12239,7 +14298,7 @@
                 <a:ea typeface="Cambria" pitchFamily="34" charset="-122"/>
                 <a:cs typeface="Cambria" pitchFamily="34" charset="-120"/>
               </a:rPr>
-              <a:t>The water lever alone is not enough.</a:t>
+              <a:t>The water lever moves the envelope by nothing.</a:t>
             </a:r>
             <a:endParaRPr lang="en-US" sz="1350" dirty="0"/>
           </a:p>
@@ -12275,7 +14334,7 @@
                   <a:srgbClr val="44555A"/>
                 </a:solidFill>
               </a:rPr>
-              <a:t>Against a real machine-shift allocation: doing nothing runs at 132.3 percent and the water lever still breaches at 124.3 percent. Only buying the salt lever gets inside, at 70.8 percent.</a:t>
+              <a:t>Doing nothing runs at 132.3 percent of a real machine-shift allowance. Counter-current rinsing runs at 132.3 percent too — identical. Only the salt lever gets inside, at 82.1 percent.</a:t>
             </a:r>
             <a:endParaRPr lang="en-US" sz="1050" dirty="0"/>
           </a:p>
@@ -12377,7 +14436,7 @@
                 <a:ea typeface="Cambria" pitchFamily="34" charset="-122"/>
                 <a:cs typeface="Cambria" pitchFamily="34" charset="-120"/>
               </a:rPr>
-              <a:t>Modelled, and labelled as such.</a:t>
+              <a:t>Checked against published plant data.</a:t>
             </a:r>
             <a:endParaRPr lang="en-US" sz="1350" dirty="0"/>
           </a:p>
@@ -12413,7 +14472,7 @@
                   <a:srgbClr val="44555A"/>
                 </a:solidFill>
               </a:rPr>
-              <a:t>95 engine tests, 8 accounting invariants on every read, a tamper-evident ledger, and 13 assumed against zero measured coefficients — enforced by a test.</a:t>
+              <a:t>Fed the 18,340 mg/L inlet CPCB measured at a Tirupur unit, the model predicts 30.6 percent reject — inside the 20–30 operators report. 21 of 25 coefficients sourced, zero measured.</a:t>
             </a:r>
             <a:endParaRPr lang="en-US" sz="1050" dirty="0"/>
           </a:p>
@@ -12427,24 +14486,24 @@
         </p:nvSpPr>
         <p:spPr>
           <a:xfrm>
-            <a:off x="685800" y="6089904"/>
-            <a:ext cx="10789920" cy="310896"/>
-          </a:xfrm>
-          <a:prstGeom prst="rect">
-            <a:avLst/>
-          </a:prstGeom>
-          <a:noFill/>
-          <a:ln/>
-        </p:spPr>
-        <p:txBody>
-          <a:bodyPr wrap="square" lIns="0" tIns="0" rIns="0" bIns="0" rtlCol="0" anchor="ctr"/>
-          <a:lstStyle/>
-          <a:p>
-            <a:pPr indent="0" marL="0">
-              <a:buNone/>
-            </a:pPr>
-            <a:r>
-              <a:rPr lang="en-US" sz="1150" b="1" dirty="0">
+            <a:off x="685800" y="6071616"/>
+            <a:ext cx="10789920" cy="402336"/>
+          </a:xfrm>
+          <a:prstGeom prst="rect">
+            <a:avLst/>
+          </a:prstGeom>
+          <a:noFill/>
+          <a:ln/>
+        </p:spPr>
+        <p:txBody>
+          <a:bodyPr wrap="square" lIns="0" tIns="0" rIns="0" bIns="0" rtlCol="0" anchor="t"/>
+          <a:lstStyle/>
+          <a:p>
+            <a:pPr indent="0" marL="0">
+              <a:buNone/>
+            </a:pPr>
+            <a:r>
+              <a:rPr lang="en-US" sz="1050" b="1" dirty="0">
                 <a:solidFill>
                   <a:srgbClr val="B98A2E"/>
                 </a:solidFill>
@@ -12455,14 +14514,14 @@
               <a:buNone/>
             </a:pPr>
             <a:r>
-              <a:rPr lang="en-US" sz="1150" dirty="0">
+              <a:rPr lang="en-US" sz="1050" dirty="0">
                 <a:solidFill>
                   <a:srgbClr val="44555A"/>
                 </a:solidFill>
               </a:rPr>
-              <a:t>one dyeing unit or common effluent plant willing to share two measured numbers — steam cost per cubic metre of reject, and the reject TDS ceiling. Our own sensitivity sweep says those two decide the answer.</a:t>
-            </a:r>
-            <a:endParaRPr lang="en-US" sz="1150" dirty="0"/>
+              <a:t>one dyeing unit or effluent plant willing to share two instrument readings — steam flow to the evaporator, and reject conductivity. Everything else is already sourced from CPCB, the CEA, TNERC and pollution-board data. Those two are all that separate a validated model from a measured one.</a:t>
+            </a:r>
+            <a:endParaRPr lang="en-US" sz="1050" dirty="0"/>
           </a:p>
         </p:txBody>
       </p:sp>
@@ -16233,7 +18292,7 @@
                 <a:ea typeface="Courier New" pitchFamily="34" charset="-122"/>
                 <a:cs typeface="Courier New" pitchFamily="34" charset="-120"/>
               </a:rPr>
-              <a:t>1,946</a:t>
+              <a:t>2,043</a:t>
             </a:r>
             <a:pPr indent="0" marL="0">
               <a:buNone/>
@@ -19029,7 +21088,7 @@
                           <a:ea typeface="Calibri" pitchFamily="34" charset="-122"/>
                           <a:cs typeface="Calibri" pitchFamily="34" charset="-120"/>
                         </a:rPr>
-                        <a:t>2,133 kWh</a:t>
+                        <a:t>2,239 kWh</a:t>
                       </a:r>
                       <a:endParaRPr lang="en-US" sz="1200" dirty="0">
                         <a:latin typeface="Calibri" charset="0"/>
@@ -19097,7 +21156,7 @@
                           <a:ea typeface="Calibri" pitchFamily="34" charset="-122"/>
                           <a:cs typeface="Calibri" pitchFamily="34" charset="-120"/>
                         </a:rPr>
-                        <a:t>3,015 kg</a:t>
+                        <a:t>3,063 kg</a:t>
                       </a:r>
                       <a:endParaRPr lang="en-US" sz="1200" dirty="0">
                         <a:latin typeface="Calibri" charset="0"/>
@@ -19165,7 +21224,7 @@
                           <a:ea typeface="Calibri" pitchFamily="34" charset="-122"/>
                           <a:cs typeface="Calibri" pitchFamily="34" charset="-120"/>
                         </a:rPr>
-                        <a:t>₹33,206</a:t>
+                        <a:t>₹33,897</a:t>
                       </a:r>
                       <a:endParaRPr lang="en-US" sz="1200" dirty="0">
                         <a:latin typeface="Calibri" charset="0"/>
@@ -19507,7 +21566,7 @@
                           <a:ea typeface="Calibri" pitchFamily="34" charset="-122"/>
                           <a:cs typeface="Calibri" pitchFamily="34" charset="-120"/>
                         </a:rPr>
-                        <a:t>2,004 kWh</a:t>
+                        <a:t>2,104 kWh</a:t>
                       </a:r>
                       <a:endParaRPr lang="en-US" sz="1200" dirty="0">
                         <a:latin typeface="Calibri" charset="0"/>
@@ -19575,7 +21634,7 @@
                           <a:ea typeface="Calibri" pitchFamily="34" charset="-122"/>
                           <a:cs typeface="Calibri" pitchFamily="34" charset="-120"/>
                         </a:rPr>
-                        <a:t>2,260 kg</a:t>
+                        <a:t>2,305 kg</a:t>
                       </a:r>
                       <a:endParaRPr lang="en-US" sz="1200" dirty="0">
                         <a:latin typeface="Calibri" charset="0"/>
@@ -19643,7 +21702,7 @@
                           <a:ea typeface="Calibri" pitchFamily="34" charset="-122"/>
                           <a:cs typeface="Calibri" pitchFamily="34" charset="-120"/>
                         </a:rPr>
-                        <a:t>₹25,908</a:t>
+                        <a:t>₹26,038</a:t>
                       </a:r>
                       <a:endParaRPr lang="en-US" sz="1200" dirty="0">
                         <a:latin typeface="Calibri" charset="0"/>
@@ -19985,7 +22044,7 @@
                           <a:ea typeface="Calibri" pitchFamily="34" charset="-122"/>
                           <a:cs typeface="Calibri" pitchFamily="34" charset="-120"/>
                         </a:rPr>
-                        <a:t>1,055 kWh</a:t>
+                        <a:t>1,108 kWh</a:t>
                       </a:r>
                       <a:endParaRPr lang="en-US" sz="1200" dirty="0">
                         <a:latin typeface="Calibri" charset="0"/>
@@ -20053,7 +22112,7 @@
                           <a:ea typeface="Calibri" pitchFamily="34" charset="-122"/>
                           <a:cs typeface="Calibri" pitchFamily="34" charset="-120"/>
                         </a:rPr>
-                        <a:t>2,171 kg</a:t>
+                        <a:t>2,194 kg</a:t>
                       </a:r>
                       <a:endParaRPr lang="en-US" sz="1200" dirty="0">
                         <a:latin typeface="Calibri" charset="0"/>
@@ -20121,7 +22180,7 @@
                           <a:ea typeface="Calibri" pitchFamily="34" charset="-122"/>
                           <a:cs typeface="Calibri" pitchFamily="34" charset="-120"/>
                         </a:rPr>
-                        <a:t>₹31,823</a:t>
+                        <a:t>₹32,781</a:t>
                       </a:r>
                       <a:endParaRPr lang="en-US" sz="1200" dirty="0">
                         <a:latin typeface="Calibri" charset="0"/>
@@ -20973,7 +23032,7 @@
                 <a:ea typeface="Courier New" pitchFamily="34" charset="-122"/>
                 <a:cs typeface="Courier New" pitchFamily="34" charset="-120"/>
               </a:rPr>
-              <a:t>11,187 L</a:t>
+              <a:t>11,907 L</a:t>
             </a:r>
             <a:endParaRPr lang="en-US" sz="1500" dirty="0"/>
           </a:p>
@@ -21012,7 +23071,7 @@
                 <a:ea typeface="Cambria" pitchFamily="34" charset="-122"/>
                 <a:cs typeface="Cambria" pitchFamily="34" charset="-120"/>
               </a:rPr>
-              <a:t>124.3%</a:t>
+              <a:t>132.3%</a:t>
             </a:r>
             <a:endParaRPr lang="en-US" sz="2200" dirty="0"/>
           </a:p>
@@ -21088,7 +23147,7 @@
         <p:spPr>
           <a:xfrm>
             <a:off x="685800" y="3840480"/>
-            <a:ext cx="4703169" cy="137160"/>
+            <a:ext cx="5005867" cy="137160"/>
           </a:xfrm>
           <a:prstGeom prst="rect">
             <a:avLst/>
@@ -21198,7 +23257,7 @@
                 <a:ea typeface="Courier New" pitchFamily="34" charset="-122"/>
                 <a:cs typeface="Courier New" pitchFamily="34" charset="-120"/>
               </a:rPr>
-              <a:t>6,369 L</a:t>
+              <a:t>7,387 L</a:t>
             </a:r>
             <a:endParaRPr lang="en-US" sz="1500" dirty="0"/>
           </a:p>
@@ -21237,7 +23296,7 @@
                 <a:ea typeface="Cambria" pitchFamily="34" charset="-122"/>
                 <a:cs typeface="Cambria" pitchFamily="34" charset="-120"/>
               </a:rPr>
-              <a:t>70.8%</a:t>
+              <a:t>82.1%</a:t>
             </a:r>
             <a:endParaRPr lang="en-US" sz="2200" dirty="0"/>
           </a:p>
@@ -21313,7 +23372,7 @@
         <p:spPr>
           <a:xfrm>
             <a:off x="685800" y="4919472"/>
-            <a:ext cx="2678877" cy="137160"/>
+            <a:ext cx="3106438" cy="137160"/>
           </a:xfrm>
           <a:prstGeom prst="rect">
             <a:avLst/>

--- a/submission/ChangeLoop_SANKALP_2026.pptx
+++ b/submission/ChangeLoop_SANKALP_2026.pptx
@@ -121,57 +121,57 @@
   <p:extLst>
     <p:ext uri="{521415D9-36F7-43E2-AB2F-B90AF26B5E84}">
       <p14:sectionLst xmlns:p14="http://schemas.microsoft.com/office/powerpoint/2010/main">
-        <p14:section name="Opening" id="{b8e1a6ff-9810-f74d-8102-7848af884533}">
+        <p14:section name="Opening" id="{cd3835f4-2b97-cd55-8fc8-7946bdf64f0e}">
           <p14:sldIdLst>
             <p14:sldId id="256"/>
           </p14:sldIdLst>
         </p14:section>
-        <p14:section name="Summary" id="{f0dd3373-f5ea-6c31-566c-15769a9ae9e6}">
+        <p14:section name="Summary" id="{154d3e0e-a07b-322b-12d0-a13ec1226d76}">
           <p14:sldIdLst>
             <p14:sldId id="257"/>
           </p14:sldIdLst>
         </p14:section>
-        <p14:section name="Problem" id="{4951a4b1-4b11-d55a-99d1-a29ea8e0fbd2}">
+        <p14:section name="Problem" id="{aa5b9e3c-c71b-9032-a902-4f6e3ecf1e80}">
           <p14:sldIdLst>
             <p14:sldId id="258"/>
             <p14:sldId id="259"/>
           </p14:sldIdLst>
         </p14:section>
-        <p14:section name="Insight" id="{6f82cd58-c86c-73ff-6e35-9a7a2c0d5e73}">
+        <p14:section name="Insight" id="{5ae240c7-3b37-4ed9-079c-305a3218955e}">
           <p14:sldIdLst>
             <p14:sldId id="260"/>
           </p14:sldIdLst>
         </p14:section>
-        <p14:section name="Solution" id="{06af25dc-e027-674e-7c1f-8a37ebdfe3f6}">
+        <p14:section name="Solution" id="{1cda6104-b4e4-b76e-ee57-3ea51fe4e278}">
           <p14:sldIdLst>
             <p14:sldId id="261"/>
           </p14:sldIdLst>
         </p14:section>
-        <p14:section name="Innovation" id="{fe1e12fd-4e1d-9a36-3e4c-370aac597b54}">
+        <p14:section name="Innovation" id="{d94f8c09-dca5-4c09-3332-6ccaf4ae7545}">
           <p14:sldIdLst>
             <p14:sldId id="262"/>
           </p14:sldIdLst>
         </p14:section>
-        <p14:section name="Product" id="{0a23c684-17c9-210c-2d3f-b5c8f8f8ff8e}">
+        <p14:section name="Product" id="{e572859a-5a4f-6295-fc83-b38efb6f74ff}">
           <p14:sldIdLst>
             <p14:sldId id="263"/>
             <p14:sldId id="264"/>
           </p14:sldIdLst>
         </p14:section>
-        <p14:section name="Impact" id="{b4b24d83-947f-c608-852f-dc0d624a31e1}">
+        <p14:section name="Impact" id="{c41b93e5-0c3f-52ba-c50c-de2de8f320ab}">
           <p14:sldIdLst>
             <p14:sldId id="265"/>
             <p14:sldId id="266"/>
           </p14:sldIdLst>
         </p14:section>
-        <p14:section name="Path" id="{1ed9f264-077b-54e2-7d15-3e2473ccf947}">
+        <p14:section name="Path" id="{0090334c-2008-a131-e02d-b1a0e381b7a0}">
           <p14:sldIdLst>
             <p14:sldId id="267"/>
             <p14:sldId id="268"/>
             <p14:sldId id="269"/>
           </p14:sldIdLst>
         </p14:section>
-        <p14:section name="Team" id="{8c281f97-4ced-bb1c-e7e3-93bb3fa2e738}">
+        <p14:section name="Team" id="{072e6817-d026-9154-d557-e9b0fbc0904d}">
           <p14:sldIdLst>
             <p14:sldId id="270"/>
           </p14:sldIdLst>
@@ -13216,7 +13216,7 @@
                   <a:srgbClr val="4ECF9E"/>
                 </a:solidFill>
               </a:rPr>
-              <a:t>95 engine tests</a:t>
+              <a:t>140 automated tests</a:t>
             </a:r>
             <a:pPr indent="0" marL="0">
               <a:buNone/>
@@ -13227,7 +13227,7 @@
                   <a:srgbClr val="B7CBD0"/>
                 </a:solidFill>
               </a:rPr>
-              <a:t>, a golden-path suite, safety-interlock tests across five fault modes, a ten-run determinism check, and a tamper test that breaks the ledger chain on purpose to prove it detects it.
+              <a:t> across 4 suites: the engine, cross-validation against published plant data, registry concurrency, safety interlocks over five fault modes, a determinism check, and a tamper test that breaks the ledger chain on purpose to prove it detects it.
 </a:t>
             </a:r>
             <a:pPr indent="0" marL="0">

--- a/submission/ChangeLoop_SANKALP_2026.pptx
+++ b/submission/ChangeLoop_SANKALP_2026.pptx
@@ -121,57 +121,57 @@
   <p:extLst>
     <p:ext uri="{521415D9-36F7-43E2-AB2F-B90AF26B5E84}">
       <p14:sectionLst xmlns:p14="http://schemas.microsoft.com/office/powerpoint/2010/main">
-        <p14:section name="Opening" id="{cd3835f4-2b97-cd55-8fc8-7946bdf64f0e}">
+        <p14:section name="Opening" id="{e087072d-af2d-2e9b-7a58-2debde40c0b1}">
           <p14:sldIdLst>
             <p14:sldId id="256"/>
           </p14:sldIdLst>
         </p14:section>
-        <p14:section name="Summary" id="{154d3e0e-a07b-322b-12d0-a13ec1226d76}">
+        <p14:section name="Summary" id="{ee1c9af7-0ca7-390f-7afd-9a6afc77317b}">
           <p14:sldIdLst>
             <p14:sldId id="257"/>
           </p14:sldIdLst>
         </p14:section>
-        <p14:section name="Problem" id="{aa5b9e3c-c71b-9032-a902-4f6e3ecf1e80}">
+        <p14:section name="Problem" id="{b2e75daa-cce1-bd61-a8b1-e6557eb00c2b}">
           <p14:sldIdLst>
             <p14:sldId id="258"/>
             <p14:sldId id="259"/>
           </p14:sldIdLst>
         </p14:section>
-        <p14:section name="Insight" id="{5ae240c7-3b37-4ed9-079c-305a3218955e}">
+        <p14:section name="Insight" id="{87c50d92-2d6a-c60c-3f49-4200444ca5b3}">
           <p14:sldIdLst>
             <p14:sldId id="260"/>
           </p14:sldIdLst>
         </p14:section>
-        <p14:section name="Solution" id="{1cda6104-b4e4-b76e-ee57-3ea51fe4e278}">
+        <p14:section name="Solution" id="{bbe45c93-bed2-50dd-d353-47910b92e246}">
           <p14:sldIdLst>
             <p14:sldId id="261"/>
           </p14:sldIdLst>
         </p14:section>
-        <p14:section name="Innovation" id="{d94f8c09-dca5-4c09-3332-6ccaf4ae7545}">
+        <p14:section name="Innovation" id="{307c11b0-b889-0275-83f6-8c0a8ee269fc}">
           <p14:sldIdLst>
             <p14:sldId id="262"/>
           </p14:sldIdLst>
         </p14:section>
-        <p14:section name="Product" id="{e572859a-5a4f-6295-fc83-b38efb6f74ff}">
+        <p14:section name="Product" id="{b738fe0a-df8d-2eae-c952-8ce69560ed9c}">
           <p14:sldIdLst>
             <p14:sldId id="263"/>
             <p14:sldId id="264"/>
           </p14:sldIdLst>
         </p14:section>
-        <p14:section name="Impact" id="{c41b93e5-0c3f-52ba-c50c-de2de8f320ab}">
+        <p14:section name="Impact" id="{a3f1d993-d08c-645f-153d-34dab13d3e7e}">
           <p14:sldIdLst>
             <p14:sldId id="265"/>
             <p14:sldId id="266"/>
           </p14:sldIdLst>
         </p14:section>
-        <p14:section name="Path" id="{0090334c-2008-a131-e02d-b1a0e381b7a0}">
+        <p14:section name="Path" id="{6bbe99e1-b040-72b8-bd9a-72adbdcc3894}">
           <p14:sldIdLst>
             <p14:sldId id="267"/>
             <p14:sldId id="268"/>
             <p14:sldId id="269"/>
           </p14:sldIdLst>
         </p14:section>
-        <p14:section name="Team" id="{072e6817-d026-9154-d557-e9b0fbc0904d}">
+        <p14:section name="Team" id="{9b9a7532-733f-bd0f-ea89-210998bea029}">
           <p14:sldIdLst>
             <p14:sldId id="270"/>
           </p14:sldIdLst>
@@ -13394,7 +13394,7 @@
                   <a:srgbClr val="B7CBD0"/>
                 </a:solidFill>
               </a:rPr>
-              <a:t>one Tirupur dyeing unit or CETP willing to share two measured numbers: steam cost per cubic metre of reject, and the reject TDS ceiling. Our own sensitivity sweep says those two decide the answer, and they are the first thing Phase 1 measures.</a:t>
+              <a:t>one Tirupur dyeing unit or CETP willing to share two instrument readings: steam flow to the evaporator, and reject conductivity. Everything else is already sourced from CPCB, the CEA, TNERC and pollution-board data — those two are all that separate a validated model from a measured one.</a:t>
             </a:r>
             <a:endParaRPr lang="en-US" sz="1200" dirty="0"/>
           </a:p>

--- a/submission/ChangeLoop_SANKALP_2026.pptx
+++ b/submission/ChangeLoop_SANKALP_2026.pptx
@@ -121,57 +121,57 @@
   <p:extLst>
     <p:ext uri="{521415D9-36F7-43E2-AB2F-B90AF26B5E84}">
       <p14:sectionLst xmlns:p14="http://schemas.microsoft.com/office/powerpoint/2010/main">
-        <p14:section name="Opening" id="{e087072d-af2d-2e9b-7a58-2debde40c0b1}">
+        <p14:section name="Opening" id="{e8942a4b-171a-fda3-4363-f03dc9d02f20}">
           <p14:sldIdLst>
             <p14:sldId id="256"/>
           </p14:sldIdLst>
         </p14:section>
-        <p14:section name="Summary" id="{ee1c9af7-0ca7-390f-7afd-9a6afc77317b}">
+        <p14:section name="Summary" id="{fce77312-1d3e-e9f9-1c9c-e33e647176aa}">
           <p14:sldIdLst>
             <p14:sldId id="257"/>
           </p14:sldIdLst>
         </p14:section>
-        <p14:section name="Problem" id="{b2e75daa-cce1-bd61-a8b1-e6557eb00c2b}">
+        <p14:section name="Problem" id="{3a092ff4-1462-d4bd-3b03-74219dcc7372}">
           <p14:sldIdLst>
             <p14:sldId id="258"/>
             <p14:sldId id="259"/>
           </p14:sldIdLst>
         </p14:section>
-        <p14:section name="Insight" id="{87c50d92-2d6a-c60c-3f49-4200444ca5b3}">
+        <p14:section name="Insight" id="{0108cbe6-aca3-0485-6c75-593d7b7d31e7}">
           <p14:sldIdLst>
             <p14:sldId id="260"/>
           </p14:sldIdLst>
         </p14:section>
-        <p14:section name="Solution" id="{bbe45c93-bed2-50dd-d353-47910b92e246}">
+        <p14:section name="Solution" id="{5b700272-c0f9-b21f-4eaf-43bf6e094487}">
           <p14:sldIdLst>
             <p14:sldId id="261"/>
           </p14:sldIdLst>
         </p14:section>
-        <p14:section name="Innovation" id="{307c11b0-b889-0275-83f6-8c0a8ee269fc}">
+        <p14:section name="Innovation" id="{2400a911-2cbc-d319-7038-5210b8919ac2}">
           <p14:sldIdLst>
             <p14:sldId id="262"/>
           </p14:sldIdLst>
         </p14:section>
-        <p14:section name="Product" id="{b738fe0a-df8d-2eae-c952-8ce69560ed9c}">
+        <p14:section name="Product" id="{21b3cc36-b598-2c79-c7d5-c7166a5b4d13}">
           <p14:sldIdLst>
             <p14:sldId id="263"/>
             <p14:sldId id="264"/>
           </p14:sldIdLst>
         </p14:section>
-        <p14:section name="Impact" id="{a3f1d993-d08c-645f-153d-34dab13d3e7e}">
+        <p14:section name="Impact" id="{8a531212-b9ef-1b60-edb6-87e9e81a4c55}">
           <p14:sldIdLst>
             <p14:sldId id="265"/>
             <p14:sldId id="266"/>
           </p14:sldIdLst>
         </p14:section>
-        <p14:section name="Path" id="{6bbe99e1-b040-72b8-bd9a-72adbdcc3894}">
+        <p14:section name="Path" id="{c614d462-8777-6f44-3436-612c5c10b407}">
           <p14:sldIdLst>
             <p14:sldId id="267"/>
             <p14:sldId id="268"/>
             <p14:sldId id="269"/>
           </p14:sldIdLst>
         </p14:section>
-        <p14:section name="Team" id="{9b9a7532-733f-bd0f-ea89-210998bea029}">
+        <p14:section name="Team" id="{4de6d143-e3ed-2f3b-dbe4-f0fa3576433c}">
           <p14:sldIdLst>
             <p14:sldId id="270"/>
           </p14:sldIdLst>
@@ -580,7 +580,7 @@
           <a:p>
             <a:r>
               <a:rPr lang="en-US" dirty="0"/>
-              <a:t>Say the title sentence out loud, then pause. Tirupur recycles 130 million litres a day under a court-mandated zero-discharge regime. It worked. It also raised costs 25 to 30 percent, and when units could not comply the courts closed them: about 11 billion rupees of exports and 100,000 jobs, by the industry association's own account. Nobody has costed the coal.</a:t>
+              <a:t>Say the title sentence out loud, then pause. In February 2011 the Madras High Court shut around 700 dyeing units in Tirupur, on a contempt petition from the farmers whose river they had been discharging into. Exports fell about a thousand crore in a quarter. The cluster rebuilt and now recycles 130 million litres a day, which worked, and raised operating costs 25 to 30 percent. Nobody has costed the coal. Job-loss estimates for 2011 range from 15,000 by the exporters association to 200,000 in press reporting, so do not quote a single figure - say tens of thousands if asked.</a:t>
             </a:r>
             <a:endParaRPr lang="en-US" dirty="0"/>
           </a:p>
@@ -3225,7 +3225,7 @@
                 <a:ea typeface="Cambria" pitchFamily="34" charset="-122"/>
                 <a:cs typeface="Cambria" pitchFamily="34" charset="-120"/>
               </a:rPr>
-              <a:t>100,000 jobs</a:t>
+              <a:t>700 units</a:t>
             </a:r>
             <a:endParaRPr lang="en-US" sz="3000" dirty="0"/>
           </a:p>
@@ -3261,7 +3261,7 @@
                   <a:srgbClr val="8FA7AD"/>
                 </a:solidFill>
               </a:rPr>
-              <a:t>LOST WHEN UNITS COULD NOT COMPLY</a:t>
+              <a:t>SHUT BY COURT ORDER IN 2011</a:t>
             </a:r>
             <a:endParaRPr lang="en-US" sz="1000" dirty="0"/>
           </a:p>

--- a/submission/ChangeLoop_SANKALP_2026.pptx
+++ b/submission/ChangeLoop_SANKALP_2026.pptx
@@ -121,57 +121,57 @@
   <p:extLst>
     <p:ext uri="{521415D9-36F7-43E2-AB2F-B90AF26B5E84}">
       <p14:sectionLst xmlns:p14="http://schemas.microsoft.com/office/powerpoint/2010/main">
-        <p14:section name="Opening" id="{e8942a4b-171a-fda3-4363-f03dc9d02f20}">
+        <p14:section name="Opening" id="{10ac7a95-df10-7d5e-59ad-95878923bdfb}">
           <p14:sldIdLst>
             <p14:sldId id="256"/>
           </p14:sldIdLst>
         </p14:section>
-        <p14:section name="Summary" id="{fce77312-1d3e-e9f9-1c9c-e33e647176aa}">
+        <p14:section name="Summary" id="{81e7e102-912a-f81e-3476-70f729c9db0d}">
           <p14:sldIdLst>
             <p14:sldId id="257"/>
           </p14:sldIdLst>
         </p14:section>
-        <p14:section name="Problem" id="{3a092ff4-1462-d4bd-3b03-74219dcc7372}">
+        <p14:section name="Problem" id="{8cfdbaf8-5262-5976-b0eb-c6f95138bb7e}">
           <p14:sldIdLst>
             <p14:sldId id="258"/>
             <p14:sldId id="259"/>
           </p14:sldIdLst>
         </p14:section>
-        <p14:section name="Insight" id="{0108cbe6-aca3-0485-6c75-593d7b7d31e7}">
+        <p14:section name="Insight" id="{8f21897b-1f1d-f5c2-c80b-bf3350ad98ae}">
           <p14:sldIdLst>
             <p14:sldId id="260"/>
           </p14:sldIdLst>
         </p14:section>
-        <p14:section name="Solution" id="{5b700272-c0f9-b21f-4eaf-43bf6e094487}">
+        <p14:section name="Solution" id="{b036496c-eec4-a40b-3b7d-529eee3c2241}">
           <p14:sldIdLst>
             <p14:sldId id="261"/>
           </p14:sldIdLst>
         </p14:section>
-        <p14:section name="Innovation" id="{2400a911-2cbc-d319-7038-5210b8919ac2}">
+        <p14:section name="Innovation" id="{8db3438d-a717-a920-4e64-9e6766cff76e}">
           <p14:sldIdLst>
             <p14:sldId id="262"/>
           </p14:sldIdLst>
         </p14:section>
-        <p14:section name="Product" id="{21b3cc36-b598-2c79-c7d5-c7166a5b4d13}">
+        <p14:section name="Product" id="{2dd0687a-d128-cf8b-840e-862f3c55ea19}">
           <p14:sldIdLst>
             <p14:sldId id="263"/>
             <p14:sldId id="264"/>
           </p14:sldIdLst>
         </p14:section>
-        <p14:section name="Impact" id="{8a531212-b9ef-1b60-edb6-87e9e81a4c55}">
+        <p14:section name="Impact" id="{cb5af419-821d-08be-bc13-85e38fc73bbb}">
           <p14:sldIdLst>
             <p14:sldId id="265"/>
             <p14:sldId id="266"/>
           </p14:sldIdLst>
         </p14:section>
-        <p14:section name="Path" id="{c614d462-8777-6f44-3436-612c5c10b407}">
+        <p14:section name="Path" id="{9b18a5bf-173d-4800-11a4-027cf2fae6cd}">
           <p14:sldIdLst>
             <p14:sldId id="267"/>
             <p14:sldId id="268"/>
             <p14:sldId id="269"/>
           </p14:sldIdLst>
         </p14:section>
-        <p14:section name="Team" id="{4de6d143-e3ed-2f3b-dbe4-f0fa3576433c}">
+        <p14:section name="Team" id="{a3b3aab2-1b48-d55e-c24c-b027da9f1b6f}">
           <p14:sldIdLst>
             <p14:sldId id="270"/>
           </p14:sldIdLst>
@@ -4028,7 +4028,7 @@
                   <a:srgbClr val="1A6B7C"/>
                 </a:solidFill>
               </a:rPr>
-              <a:t>398.9 million litres</a:t>
+              <a:t>75.0 million litres</a:t>
             </a:r>
             <a:pPr indent="0" marL="0">
               <a:buNone/>
@@ -10263,7 +10263,7 @@
                 <a:ea typeface="Cambria" pitchFamily="34" charset="-122"/>
                 <a:cs typeface="Cambria" pitchFamily="34" charset="-120"/>
               </a:rPr>
-              <a:t>140</a:t>
+              <a:t>143</a:t>
             </a:r>
             <a:endParaRPr lang="en-US" sz="3200" dirty="0"/>
           </a:p>
@@ -13216,7 +13216,7 @@
                   <a:srgbClr val="4ECF9E"/>
                 </a:solidFill>
               </a:rPr>
-              <a:t>140 automated tests</a:t>
+              <a:t>143 automated tests</a:t>
             </a:r>
             <a:pPr indent="0" marL="0">
               <a:buNone/>

--- a/submission/ChangeLoop_SANKALP_2026.pptx
+++ b/submission/ChangeLoop_SANKALP_2026.pptx
@@ -121,57 +121,57 @@
   <p:extLst>
     <p:ext uri="{521415D9-36F7-43E2-AB2F-B90AF26B5E84}">
       <p14:sectionLst xmlns:p14="http://schemas.microsoft.com/office/powerpoint/2010/main">
-        <p14:section name="Opening" id="{10ac7a95-df10-7d5e-59ad-95878923bdfb}">
+        <p14:section name="Opening" id="{6386af24-d665-9d2e-3e5a-f276a7e7d9a3}">
           <p14:sldIdLst>
             <p14:sldId id="256"/>
           </p14:sldIdLst>
         </p14:section>
-        <p14:section name="Summary" id="{81e7e102-912a-f81e-3476-70f729c9db0d}">
+        <p14:section name="Summary" id="{368b1603-8cc9-dd1c-06ac-f48f479e3236}">
           <p14:sldIdLst>
             <p14:sldId id="257"/>
           </p14:sldIdLst>
         </p14:section>
-        <p14:section name="Problem" id="{8cfdbaf8-5262-5976-b0eb-c6f95138bb7e}">
+        <p14:section name="Problem" id="{16e5367b-3183-c894-5424-4749e33ecfcc}">
           <p14:sldIdLst>
             <p14:sldId id="258"/>
             <p14:sldId id="259"/>
           </p14:sldIdLst>
         </p14:section>
-        <p14:section name="Insight" id="{8f21897b-1f1d-f5c2-c80b-bf3350ad98ae}">
+        <p14:section name="Insight" id="{1aba06ae-114c-a1aa-2246-376f51641f88}">
           <p14:sldIdLst>
             <p14:sldId id="260"/>
           </p14:sldIdLst>
         </p14:section>
-        <p14:section name="Solution" id="{b036496c-eec4-a40b-3b7d-529eee3c2241}">
+        <p14:section name="Solution" id="{aa678537-8fde-b4d1-ffeb-ca09d284ddee}">
           <p14:sldIdLst>
             <p14:sldId id="261"/>
           </p14:sldIdLst>
         </p14:section>
-        <p14:section name="Innovation" id="{8db3438d-a717-a920-4e64-9e6766cff76e}">
+        <p14:section name="Innovation" id="{b4ed75d2-c459-826f-d77c-05de0947bf71}">
           <p14:sldIdLst>
             <p14:sldId id="262"/>
           </p14:sldIdLst>
         </p14:section>
-        <p14:section name="Product" id="{2dd0687a-d128-cf8b-840e-862f3c55ea19}">
+        <p14:section name="Product" id="{3e24d67d-6b8d-bd6a-9965-c7dd9034a006}">
           <p14:sldIdLst>
             <p14:sldId id="263"/>
             <p14:sldId id="264"/>
           </p14:sldIdLst>
         </p14:section>
-        <p14:section name="Impact" id="{cb5af419-821d-08be-bc13-85e38fc73bbb}">
+        <p14:section name="Impact" id="{a4b43cf9-c5de-9a81-2142-e2df29a3edc7}">
           <p14:sldIdLst>
             <p14:sldId id="265"/>
             <p14:sldId id="266"/>
           </p14:sldIdLst>
         </p14:section>
-        <p14:section name="Path" id="{9b18a5bf-173d-4800-11a4-027cf2fae6cd}">
+        <p14:section name="Path" id="{e93d07af-c0db-0d7b-ee37-453b532021ad}">
           <p14:sldIdLst>
             <p14:sldId id="267"/>
             <p14:sldId id="268"/>
             <p14:sldId id="269"/>
           </p14:sldIdLst>
         </p14:section>
-        <p14:section name="Team" id="{a3b3aab2-1b48-d55e-c24c-b027da9f1b6f}">
+        <p14:section name="Team" id="{938a7cd8-6d9a-b3d3-ae75-b26e9f8e74fc}">
           <p14:sldIdLst>
             <p14:sldId id="270"/>
           </p14:sldIdLst>
@@ -10263,7 +10263,7 @@
                 <a:ea typeface="Cambria" pitchFamily="34" charset="-122"/>
                 <a:cs typeface="Cambria" pitchFamily="34" charset="-120"/>
               </a:rPr>
-              <a:t>143</a:t>
+              <a:t>163</a:t>
             </a:r>
             <a:endParaRPr lang="en-US" sz="3200" dirty="0"/>
           </a:p>
@@ -10388,7 +10388,7 @@
                 <a:ea typeface="Cambria" pitchFamily="34" charset="-122"/>
                 <a:cs typeface="Cambria" pitchFamily="34" charset="-120"/>
               </a:rPr>
-              <a:t>32</a:t>
+              <a:t>33</a:t>
             </a:r>
             <a:endParaRPr lang="en-US" sz="3200" dirty="0"/>
           </a:p>
@@ -13216,7 +13216,7 @@
                   <a:srgbClr val="4ECF9E"/>
                 </a:solidFill>
               </a:rPr>
-              <a:t>143 automated tests</a:t>
+              <a:t>163 automated tests</a:t>
             </a:r>
             <a:pPr indent="0" marL="0">
               <a:buNone/>
@@ -13227,7 +13227,7 @@
                   <a:srgbClr val="B7CBD0"/>
                 </a:solidFill>
               </a:rPr>
-              <a:t> across 4 suites: the engine, cross-validation against published plant data, registry concurrency, safety interlocks over five fault modes, a determinism check, and a tamper test that breaks the ledger chain on purpose to prove it detects it.
+              <a:t> across 5 suites: the engine, cross-validation against published plant data, registry concurrency, safety interlocks over five fault modes, a determinism check, and a tamper test that breaks the ledger chain on purpose to prove it detects it.
 </a:t>
             </a:r>
             <a:pPr indent="0" marL="0">

--- a/submission/ChangeLoop_SANKALP_2026.pptx
+++ b/submission/ChangeLoop_SANKALP_2026.pptx
@@ -121,57 +121,57 @@
   <p:extLst>
     <p:ext uri="{521415D9-36F7-43E2-AB2F-B90AF26B5E84}">
       <p14:sectionLst xmlns:p14="http://schemas.microsoft.com/office/powerpoint/2010/main">
-        <p14:section name="Opening" id="{6386af24-d665-9d2e-3e5a-f276a7e7d9a3}">
+        <p14:section name="Opening" id="{bed1ffef-c3c1-c144-8f4a-155d8901f0a2}">
           <p14:sldIdLst>
             <p14:sldId id="256"/>
           </p14:sldIdLst>
         </p14:section>
-        <p14:section name="Summary" id="{368b1603-8cc9-dd1c-06ac-f48f479e3236}">
+        <p14:section name="Summary" id="{b3c8dfb6-44a8-c6ac-6980-d0632dfa2270}">
           <p14:sldIdLst>
             <p14:sldId id="257"/>
           </p14:sldIdLst>
         </p14:section>
-        <p14:section name="Problem" id="{16e5367b-3183-c894-5424-4749e33ecfcc}">
+        <p14:section name="Problem" id="{c21eb33c-a1e7-8e25-3a7f-970dd802ad4a}">
           <p14:sldIdLst>
             <p14:sldId id="258"/>
             <p14:sldId id="259"/>
           </p14:sldIdLst>
         </p14:section>
-        <p14:section name="Insight" id="{1aba06ae-114c-a1aa-2246-376f51641f88}">
+        <p14:section name="Insight" id="{1d73e585-de11-e84a-dfc4-6cdff92cec9a}">
           <p14:sldIdLst>
             <p14:sldId id="260"/>
           </p14:sldIdLst>
         </p14:section>
-        <p14:section name="Solution" id="{aa678537-8fde-b4d1-ffeb-ca09d284ddee}">
+        <p14:section name="Solution" id="{8f5a7127-9f4a-d3ec-0f95-f5600971a242}">
           <p14:sldIdLst>
             <p14:sldId id="261"/>
           </p14:sldIdLst>
         </p14:section>
-        <p14:section name="Innovation" id="{b4ed75d2-c459-826f-d77c-05de0947bf71}">
+        <p14:section name="Innovation" id="{07ff8fbc-2deb-9554-bb1d-cbad5709fd13}">
           <p14:sldIdLst>
             <p14:sldId id="262"/>
           </p14:sldIdLst>
         </p14:section>
-        <p14:section name="Product" id="{3e24d67d-6b8d-bd6a-9965-c7dd9034a006}">
+        <p14:section name="Product" id="{0e415938-1f6a-c751-5356-5b1c8f2dffda}">
           <p14:sldIdLst>
             <p14:sldId id="263"/>
             <p14:sldId id="264"/>
           </p14:sldIdLst>
         </p14:section>
-        <p14:section name="Impact" id="{a4b43cf9-c5de-9a81-2142-e2df29a3edc7}">
+        <p14:section name="Impact" id="{cd37c354-327b-d64f-57d3-bc7902840a7f}">
           <p14:sldIdLst>
             <p14:sldId id="265"/>
             <p14:sldId id="266"/>
           </p14:sldIdLst>
         </p14:section>
-        <p14:section name="Path" id="{e93d07af-c0db-0d7b-ee37-453b532021ad}">
+        <p14:section name="Path" id="{9215706b-2068-5b27-dbc1-a0f31fc3d756}">
           <p14:sldIdLst>
             <p14:sldId id="267"/>
             <p14:sldId id="268"/>
             <p14:sldId id="269"/>
           </p14:sldIdLst>
         </p14:section>
-        <p14:section name="Team" id="{938a7cd8-6d9a-b3d3-ae75-b26e9f8e74fc}">
+        <p14:section name="Team" id="{1dc70e39-b594-2b81-7f9a-f0a48a259e0e}">
           <p14:sldIdLst>
             <p14:sldId id="270"/>
           </p14:sldIdLst>
@@ -2987,7 +2987,7 @@
                 <a:ea typeface="Cambria" pitchFamily="34" charset="-122"/>
                 <a:cs typeface="Cambria" pitchFamily="34" charset="-120"/>
               </a:rPr>
-              <a:t>In a zero-discharge dyehouse, the coal bill is set by how much salt goes into the dye bath — not by how much water comes out.</a:t>
+              <a:t>In a zero-discharge dyehouse, the evaporator's fuel bill is set by how much salt goes into the dye bath — not by how much water comes out.</a:t>
             </a:r>
             <a:endParaRPr lang="en-US" sz="3600" dirty="0"/>
           </a:p>
@@ -10263,7 +10263,7 @@
                 <a:ea typeface="Cambria" pitchFamily="34" charset="-122"/>
                 <a:cs typeface="Cambria" pitchFamily="34" charset="-120"/>
               </a:rPr>
-              <a:t>163</a:t>
+              <a:t>180</a:t>
             </a:r>
             <a:endParaRPr lang="en-US" sz="3200" dirty="0"/>
           </a:p>
@@ -10388,7 +10388,7 @@
                 <a:ea typeface="Cambria" pitchFamily="34" charset="-122"/>
                 <a:cs typeface="Cambria" pitchFamily="34" charset="-120"/>
               </a:rPr>
-              <a:t>33</a:t>
+              <a:t>34</a:t>
             </a:r>
             <a:endParaRPr lang="en-US" sz="3200" dirty="0"/>
           </a:p>
@@ -13216,7 +13216,7 @@
                   <a:srgbClr val="4ECF9E"/>
                 </a:solidFill>
               </a:rPr>
-              <a:t>163 automated tests</a:t>
+              <a:t>180 automated tests</a:t>
             </a:r>
             <a:pPr indent="0" marL="0">
               <a:buNone/>
@@ -13227,7 +13227,7 @@
                   <a:srgbClr val="B7CBD0"/>
                 </a:solidFill>
               </a:rPr>
-              <a:t> across 5 suites: the engine, cross-validation against published plant data, registry concurrency, safety interlocks over five fault modes, a determinism check, and a tamper test that breaks the ledger chain on purpose to prove it detects it.
+              <a:t> across 6 suites: the engine, cross-validation against published plant data, registry concurrency, safety interlocks over five fault modes, a determinism check, and a tamper test that breaks the ledger chain on purpose to prove it detects it.
 </a:t>
             </a:r>
             <a:pPr indent="0" marL="0">

--- a/submission/ChangeLoop_SANKALP_2026.pptx
+++ b/submission/ChangeLoop_SANKALP_2026.pptx
@@ -121,57 +121,57 @@
   <p:extLst>
     <p:ext uri="{521415D9-36F7-43E2-AB2F-B90AF26B5E84}">
       <p14:sectionLst xmlns:p14="http://schemas.microsoft.com/office/powerpoint/2010/main">
-        <p14:section name="Opening" id="{bed1ffef-c3c1-c144-8f4a-155d8901f0a2}">
+        <p14:section name="Opening" id="{f000cdd1-03d0-d810-d607-81d7ffadde83}">
           <p14:sldIdLst>
             <p14:sldId id="256"/>
           </p14:sldIdLst>
         </p14:section>
-        <p14:section name="Summary" id="{b3c8dfb6-44a8-c6ac-6980-d0632dfa2270}">
+        <p14:section name="Summary" id="{a2bff092-b6c9-d63a-2ce1-f75459f398df}">
           <p14:sldIdLst>
             <p14:sldId id="257"/>
           </p14:sldIdLst>
         </p14:section>
-        <p14:section name="Problem" id="{c21eb33c-a1e7-8e25-3a7f-970dd802ad4a}">
+        <p14:section name="Problem" id="{fff3a84f-2bb3-d431-d5d0-b2da1e2a93a9}">
           <p14:sldIdLst>
             <p14:sldId id="258"/>
             <p14:sldId id="259"/>
           </p14:sldIdLst>
         </p14:section>
-        <p14:section name="Insight" id="{1d73e585-de11-e84a-dfc4-6cdff92cec9a}">
+        <p14:section name="Insight" id="{cf7bf143-b137-3745-d4bb-ee475fd26b78}">
           <p14:sldIdLst>
             <p14:sldId id="260"/>
           </p14:sldIdLst>
         </p14:section>
-        <p14:section name="Solution" id="{8f5a7127-9f4a-d3ec-0f95-f5600971a242}">
+        <p14:section name="Solution" id="{f511c4db-9c90-75d1-82b4-0aa8bd5f92f4}">
           <p14:sldIdLst>
             <p14:sldId id="261"/>
           </p14:sldIdLst>
         </p14:section>
-        <p14:section name="Innovation" id="{07ff8fbc-2deb-9554-bb1d-cbad5709fd13}">
+        <p14:section name="Innovation" id="{d4b225c5-a0ae-1a95-0340-2674e20c524e}">
           <p14:sldIdLst>
             <p14:sldId id="262"/>
           </p14:sldIdLst>
         </p14:section>
-        <p14:section name="Product" id="{0e415938-1f6a-c751-5356-5b1c8f2dffda}">
+        <p14:section name="Product" id="{c92ef550-64c5-4d4f-9ac1-cd11875cb15d}">
           <p14:sldIdLst>
             <p14:sldId id="263"/>
             <p14:sldId id="264"/>
           </p14:sldIdLst>
         </p14:section>
-        <p14:section name="Impact" id="{cd37c354-327b-d64f-57d3-bc7902840a7f}">
+        <p14:section name="Impact" id="{f62fad7b-d960-7b0a-d8dd-a8a0225de3e7}">
           <p14:sldIdLst>
             <p14:sldId id="265"/>
             <p14:sldId id="266"/>
           </p14:sldIdLst>
         </p14:section>
-        <p14:section name="Path" id="{9215706b-2068-5b27-dbc1-a0f31fc3d756}">
+        <p14:section name="Path" id="{217cf98d-008f-b9dc-a200-2b1e17928549}">
           <p14:sldIdLst>
             <p14:sldId id="267"/>
             <p14:sldId id="268"/>
             <p14:sldId id="269"/>
           </p14:sldIdLst>
         </p14:section>
-        <p14:section name="Team" id="{1dc70e39-b594-2b81-7f9a-f0a48a259e0e}">
+        <p14:section name="Team" id="{c56865b3-c7f8-84c8-e0a1-1c4c86aba633}">
           <p14:sldIdLst>
             <p14:sldId id="270"/>
           </p14:sldIdLst>
@@ -13035,7 +13035,7 @@
                 <a:ea typeface="Cambria" pitchFamily="34" charset="-122"/>
                 <a:cs typeface="Cambria" pitchFamily="34" charset="-120"/>
               </a:rPr>
-              <a:t>Shorya Mittal</a:t>
+              <a:t>Shorya Ashish Mittal</a:t>
             </a:r>
             <a:endParaRPr lang="en-US" sz="1900" dirty="0"/>
           </a:p>

--- a/submission/ChangeLoop_SANKALP_2026.pptx
+++ b/submission/ChangeLoop_SANKALP_2026.pptx
@@ -121,57 +121,57 @@
   <p:extLst>
     <p:ext uri="{521415D9-36F7-43E2-AB2F-B90AF26B5E84}">
       <p14:sectionLst xmlns:p14="http://schemas.microsoft.com/office/powerpoint/2010/main">
-        <p14:section name="Opening" id="{f000cdd1-03d0-d810-d607-81d7ffadde83}">
+        <p14:section name="Opening" id="{15523163-1eea-9b37-c2c7-d8d40777dd4f}">
           <p14:sldIdLst>
             <p14:sldId id="256"/>
           </p14:sldIdLst>
         </p14:section>
-        <p14:section name="Summary" id="{a2bff092-b6c9-d63a-2ce1-f75459f398df}">
+        <p14:section name="Summary" id="{f8c5ece6-f239-5f7a-d64c-e17b5d2698a4}">
           <p14:sldIdLst>
             <p14:sldId id="257"/>
           </p14:sldIdLst>
         </p14:section>
-        <p14:section name="Problem" id="{fff3a84f-2bb3-d431-d5d0-b2da1e2a93a9}">
+        <p14:section name="Problem" id="{e04f1e38-a494-c005-3471-7b57f7860a7a}">
           <p14:sldIdLst>
             <p14:sldId id="258"/>
             <p14:sldId id="259"/>
           </p14:sldIdLst>
         </p14:section>
-        <p14:section name="Insight" id="{cf7bf143-b137-3745-d4bb-ee475fd26b78}">
+        <p14:section name="Insight" id="{e08c5cea-b494-a784-388d-d24436242a50}">
           <p14:sldIdLst>
             <p14:sldId id="260"/>
           </p14:sldIdLst>
         </p14:section>
-        <p14:section name="Solution" id="{f511c4db-9c90-75d1-82b4-0aa8bd5f92f4}">
+        <p14:section name="Solution" id="{a16ea3a3-4e36-6dbb-d119-7d2aaeee3507}">
           <p14:sldIdLst>
             <p14:sldId id="261"/>
           </p14:sldIdLst>
         </p14:section>
-        <p14:section name="Innovation" id="{d4b225c5-a0ae-1a95-0340-2674e20c524e}">
+        <p14:section name="Innovation" id="{a269819f-4daa-8327-9cf4-fba942869327}">
           <p14:sldIdLst>
             <p14:sldId id="262"/>
           </p14:sldIdLst>
         </p14:section>
-        <p14:section name="Product" id="{c92ef550-64c5-4d4f-9ac1-cd11875cb15d}">
+        <p14:section name="Product" id="{6a62c62c-9761-c6d2-3ce3-457c02fc2835}">
           <p14:sldIdLst>
             <p14:sldId id="263"/>
             <p14:sldId id="264"/>
           </p14:sldIdLst>
         </p14:section>
-        <p14:section name="Impact" id="{f62fad7b-d960-7b0a-d8dd-a8a0225de3e7}">
+        <p14:section name="Impact" id="{fb3f355d-2f6f-91fc-a37b-75cd8d3432cc}">
           <p14:sldIdLst>
             <p14:sldId id="265"/>
             <p14:sldId id="266"/>
           </p14:sldIdLst>
         </p14:section>
-        <p14:section name="Path" id="{217cf98d-008f-b9dc-a200-2b1e17928549}">
+        <p14:section name="Path" id="{cd171825-49a9-361a-1741-5640d7eb2d10}">
           <p14:sldIdLst>
             <p14:sldId id="267"/>
             <p14:sldId id="268"/>
             <p14:sldId id="269"/>
           </p14:sldIdLst>
         </p14:section>
-        <p14:section name="Team" id="{c56865b3-c7f8-84c8-e0a1-1c4c86aba633}">
+        <p14:section name="Team" id="{18391878-70fb-804a-6bc3-95d39c76e8fd}">
           <p14:sldIdLst>
             <p14:sldId id="270"/>
           </p14:sldIdLst>
@@ -580,7 +580,7 @@
           <a:p>
             <a:r>
               <a:rPr lang="en-US" dirty="0"/>
-              <a:t>Say the title sentence out loud, then pause. In February 2011 the Madras High Court shut around 700 dyeing units in Tirupur, on a contempt petition from the farmers whose river they had been discharging into. Exports fell about a thousand crore in a quarter. The cluster rebuilt and now recycles 130 million litres a day, which worked, and raised operating costs 25 to 30 percent. Nobody has costed the coal. Job-loss estimates for 2011 range from 15,000 by the exporters association to 200,000 in press reporting, so do not quote a single figure - say tens of thousands if asked.</a:t>
+              <a:t>Say the title sentence out loud, then pause. In February 2011 the Madras High Court shut around 700 dyeing units in Tirupur, on a contempt petition from the farmers whose river they had been discharging into. Exports fell about a thousand crore in a quarter. The cluster rebuilt and now recycles 130 million litres a day, which worked, and raised operating costs 25 to 30 percent. Nobody has costed the fuel. Job-loss estimates for 2011 range from 15,000 by the exporters association to 200,000 in press reporting, so do not quote a single figure - say tens of thousands if asked.</a:t>
             </a:r>
             <a:endParaRPr lang="en-US" dirty="0"/>
           </a:p>
@@ -668,7 +668,7 @@
           <a:p>
             <a:r>
               <a:rPr lang="en-US" dirty="0"/>
-              <a:t>Our per-shift numbers are modest and we present them that way deliberately. A modest figure that survives scrutiny is worth more to us than an impressive one we cannot defend. Note freshwater falls 8.8 percent while cost falls 28.7 and carbon 30.6, because basin draw tracks salt while cost and carbon also pick up the rinse-water heat.</a:t>
+              <a:t>Our per-shift numbers are modest and we present them that way deliberately. A modest figure that survives scrutiny is worth more to us than an impressive one we cannot defend. Note freshwater falls 8.8% while cost falls 28.6% and carbon 30.2%, because basin draw tracks salt while cost and carbon also pick up the rinse-water heat.</a:t>
             </a:r>
             <a:endParaRPr lang="en-US" dirty="0"/>
           </a:p>
@@ -3025,7 +3025,7 @@
                   <a:srgbClr val="FFFFFF"/>
                 </a:solidFill>
               </a:rPr>
-              <a:t>A scheduling choice this morning sets how much coal the evaporator burns tonight. </a:t>
+              <a:t>A scheduling choice this morning sets how much fuel the evaporator burns tonight. </a:t>
             </a:r>
             <a:pPr indent="0" marL="0">
               <a:buNone/>
@@ -3880,7 +3880,7 @@
                   <a:srgbClr val="6B8086"/>
                 </a:solidFill>
               </a:rPr>
-              <a:t>CO₂E AVOIDED, DOWN 30.6%</a:t>
+              <a:t>CO₂E AVOIDED, DOWN 30.2%</a:t>
             </a:r>
             <a:endParaRPr lang="en-US" sz="1000" dirty="0"/>
           </a:p>
@@ -3916,7 +3916,7 @@
                   <a:srgbClr val="55676C"/>
                 </a:solidFill>
               </a:rPr>
-              <a:t>₹10,171 saved per shift,</a:t>
+              <a:t>₹9,709 saved per shift,</a:t>
             </a:r>
             <a:endParaRPr lang="en-US" sz="1100" dirty="0"/>
           </a:p>
@@ -3930,7 +3930,7 @@
                   <a:srgbClr val="55676C"/>
                 </a:solidFill>
               </a:rPr>
-              <a:t>down 28.7%</a:t>
+              <a:t>down 28.6%</a:t>
             </a:r>
             <a:endParaRPr lang="en-US" sz="1100" dirty="0"/>
           </a:p>
@@ -4421,7 +4421,7 @@
                   <a:srgbClr val="44555A"/>
                 </a:solidFill>
               </a:rPr>
-              <a:t>Reproducible from the product’s own API. A scheduler that optimises dyehouse water alone captures 13 percent of the available benefit.</a:t>
+              <a:t>Reproducible from the product’s own API. At today’s prices, the layers that bind are the salt model and the ship-date rules. Price water scarcity and a scheduler that optimises dyehouse water alone captures 13 percent of the available benefit.</a:t>
             </a:r>
             <a:endParaRPr lang="en-US" sz="1450" dirty="0"/>
           </a:p>
@@ -10263,7 +10263,7 @@
                 <a:ea typeface="Cambria" pitchFamily="34" charset="-122"/>
                 <a:cs typeface="Cambria" pitchFamily="34" charset="-120"/>
               </a:rPr>
-              <a:t>180</a:t>
+              <a:t>190</a:t>
             </a:r>
             <a:endParaRPr lang="en-US" sz="3200" dirty="0"/>
           </a:p>
@@ -13216,7 +13216,7 @@
                   <a:srgbClr val="4ECF9E"/>
                 </a:solidFill>
               </a:rPr>
-              <a:t>180 automated tests</a:t>
+              <a:t>190 automated tests</a:t>
             </a:r>
             <a:pPr indent="0" marL="0">
               <a:buNone/>
@@ -13227,7 +13227,7 @@
                   <a:srgbClr val="B7CBD0"/>
                 </a:solidFill>
               </a:rPr>
-              <a:t> across 6 suites: the engine, cross-validation against published plant data, registry concurrency, safety interlocks over five fault modes, a determinism check, and a tamper test that breaks the ledger chain on purpose to prove it detects it.
+              <a:t> across 7 suites: the engine, cross-validation against published plant data, registry concurrency, safety interlocks over five fault modes, a determinism check, and a tamper test that breaks the ledger chain on purpose to prove it detects it.
 </a:t>
             </a:r>
             <a:pPr indent="0" marL="0">
@@ -13430,7 +13430,7 @@
                   <a:srgbClr val="FFFFFF"/>
                 </a:solidFill>
               </a:rPr>
-              <a:t>Zero Liquid Discharge gave India back its water. Nobody costed the coal it takes to keep it — and that cost is decided by a scheduling choice nobody connects to it.</a:t>
+              <a:t>Zero Liquid Discharge gave India back its water. Nobody costed the fuel it takes to keep it — and that cost is decided by a scheduling choice nobody connects to it.</a:t>
             </a:r>
             <a:endParaRPr lang="en-US" sz="1500" dirty="0"/>
           </a:p>
@@ -16824,7 +16824,7 @@
                   <a:srgbClr val="E3EDEF"/>
                 </a:solidFill>
               </a:rPr>
-              <a:t>Reject volume — and therefore evaporator steam, coal and CO₂ — is set by SALT MASS, not by water volume.</a:t>
+              <a:t>Reject volume — and therefore evaporator steam, fuel and CO₂ — is set by SALT MASS, not by water volume.</a:t>
             </a:r>
             <a:endParaRPr lang="en-US" sz="1400" dirty="0"/>
           </a:p>
